--- a/icr_paper/ICR_figures_english.pptx
+++ b/icr_paper/ICR_figures_english.pptx
@@ -3415,15 +3415,14 @@
                     <a:bodyPr/>
                     <a:lstStyle/>
                     <a:p>
-                      <a:pPr algn="ctr">
-                        <a:defRPr sz="1100" b="1">
+                      <a:pPr algn="ctr"/>
+                      <a:r>
+                        <a:rPr sz="1100" b="1">
                           <a:solidFill>
                             <a:srgbClr val="FFFFFF"/>
                           </a:solidFill>
                           <a:latin typeface="Calibri"/>
-                        </a:defRPr>
-                      </a:pPr>
-                      <a:r>
+                        </a:rPr>
                         <a:t>Study</a:t>
                       </a:r>
                     </a:p>
@@ -3439,15 +3438,14 @@
                     <a:bodyPr/>
                     <a:lstStyle/>
                     <a:p>
-                      <a:pPr algn="ctr">
-                        <a:defRPr sz="1100" b="1">
+                      <a:pPr algn="ctr"/>
+                      <a:r>
+                        <a:rPr sz="1100" b="1">
                           <a:solidFill>
                             <a:srgbClr val="FFFFFF"/>
                           </a:solidFill>
                           <a:latin typeface="Calibri"/>
-                        </a:defRPr>
-                      </a:pPr>
-                      <a:r>
+                        </a:rPr>
                         <a:t>D</a:t>
                       </a:r>
                     </a:p>
@@ -3463,15 +3461,14 @@
                     <a:bodyPr/>
                     <a:lstStyle/>
                     <a:p>
-                      <a:pPr algn="ctr">
-                        <a:defRPr sz="1100" b="1">
+                      <a:pPr algn="ctr"/>
+                      <a:r>
+                        <a:rPr sz="1100" b="1">
                           <a:solidFill>
                             <a:srgbClr val="FFFFFF"/>
                           </a:solidFill>
                           <a:latin typeface="Calibri"/>
-                        </a:defRPr>
-                      </a:pPr>
-                      <a:r>
+                        </a:rPr>
                         <a:t>d</a:t>
                       </a:r>
                     </a:p>
@@ -3487,15 +3484,14 @@
                     <a:bodyPr/>
                     <a:lstStyle/>
                     <a:p>
-                      <a:pPr algn="ctr">
-                        <a:defRPr sz="1100" b="1">
+                      <a:pPr algn="ctr"/>
+                      <a:r>
+                        <a:rPr sz="1100" b="1">
                           <a:solidFill>
                             <a:srgbClr val="FFFFFF"/>
                           </a:solidFill>
                           <a:latin typeface="Calibri"/>
-                        </a:defRPr>
-                      </a:pPr>
-                      <a:r>
+                        </a:rPr>
                         <a:t>ICR_std</a:t>
                       </a:r>
                     </a:p>
@@ -3511,15 +3507,14 @@
                     <a:bodyPr/>
                     <a:lstStyle/>
                     <a:p>
-                      <a:pPr algn="ctr">
-                        <a:defRPr sz="1100" b="1">
+                      <a:pPr algn="ctr"/>
+                      <a:r>
+                        <a:rPr sz="1100" b="1">
                           <a:solidFill>
                             <a:srgbClr val="FFFFFF"/>
                           </a:solidFill>
                           <a:latin typeface="Calibri"/>
-                        </a:defRPr>
-                      </a:pPr>
-                      <a:r>
+                        </a:rPr>
                         <a:t>Effect Size</a:t>
                       </a:r>
                     </a:p>
@@ -3537,12 +3532,11 @@
                     <a:bodyPr/>
                     <a:lstStyle/>
                     <a:p>
-                      <a:pPr algn="ctr">
-                        <a:defRPr sz="1000">
-                          <a:latin typeface="Calibri"/>
-                        </a:defRPr>
-                      </a:pPr>
-                      <a:r>
+                      <a:pPr algn="ctr"/>
+                      <a:r>
+                        <a:rPr sz="1000">
+                          <a:latin typeface="Calibri"/>
+                        </a:rPr>
                         <a:t>4S (1994)</a:t>
                       </a:r>
                     </a:p>
@@ -3558,12 +3552,11 @@
                     <a:bodyPr/>
                     <a:lstStyle/>
                     <a:p>
-                      <a:pPr algn="ctr">
-                        <a:defRPr sz="1000">
-                          <a:latin typeface="Calibri"/>
-                        </a:defRPr>
-                      </a:pPr>
-                      <a:r>
+                      <a:pPr algn="ctr"/>
+                      <a:r>
+                        <a:rPr sz="1000">
+                          <a:latin typeface="Calibri"/>
+                        </a:rPr>
                         <a:t>10</a:t>
                       </a:r>
                     </a:p>
@@ -3579,12 +3572,11 @@
                     <a:bodyPr/>
                     <a:lstStyle/>
                     <a:p>
-                      <a:pPr algn="ctr">
-                        <a:defRPr sz="1000">
-                          <a:latin typeface="Calibri"/>
-                        </a:defRPr>
-                      </a:pPr>
-                      <a:r>
+                      <a:pPr algn="ctr"/>
+                      <a:r>
+                        <a:rPr sz="1000">
+                          <a:latin typeface="Calibri"/>
+                        </a:rPr>
                         <a:t>1</a:t>
                       </a:r>
                     </a:p>
@@ -3600,12 +3592,11 @@
                     <a:bodyPr/>
                     <a:lstStyle/>
                     <a:p>
-                      <a:pPr algn="ctr">
-                        <a:defRPr sz="1000">
-                          <a:latin typeface="Calibri"/>
-                        </a:defRPr>
-                      </a:pPr>
-                      <a:r>
+                      <a:pPr algn="ctr"/>
+                      <a:r>
+                        <a:rPr sz="1000">
+                          <a:latin typeface="Calibri"/>
+                        </a:rPr>
                         <a:t>0.100</a:t>
                       </a:r>
                     </a:p>
@@ -3621,12 +3612,11 @@
                     <a:bodyPr/>
                     <a:lstStyle/>
                     <a:p>
-                      <a:pPr algn="ctr">
-                        <a:defRPr sz="1000">
-                          <a:latin typeface="Calibri"/>
-                        </a:defRPr>
-                      </a:pPr>
-                      <a:r>
+                      <a:pPr algn="ctr"/>
+                      <a:r>
+                        <a:rPr sz="1000">
+                          <a:latin typeface="Calibri"/>
+                        </a:rPr>
                         <a:t>-0.370</a:t>
                       </a:r>
                     </a:p>
@@ -3644,12 +3634,11 @@
                     <a:bodyPr/>
                     <a:lstStyle/>
                     <a:p>
-                      <a:pPr algn="ctr">
-                        <a:defRPr sz="1000">
-                          <a:latin typeface="Calibri"/>
-                        </a:defRPr>
-                      </a:pPr>
-                      <a:r>
+                      <a:pPr algn="ctr"/>
+                      <a:r>
+                        <a:rPr sz="1000">
+                          <a:latin typeface="Calibri"/>
+                        </a:rPr>
                         <a:t>WOSCOPS (1995)</a:t>
                       </a:r>
                     </a:p>
@@ -3661,12 +3650,11 @@
                     <a:bodyPr/>
                     <a:lstStyle/>
                     <a:p>
-                      <a:pPr algn="ctr">
-                        <a:defRPr sz="1000">
-                          <a:latin typeface="Calibri"/>
-                        </a:defRPr>
-                      </a:pPr>
-                      <a:r>
+                      <a:pPr algn="ctr"/>
+                      <a:r>
+                        <a:rPr sz="1000">
+                          <a:latin typeface="Calibri"/>
+                        </a:rPr>
                         <a:t>10</a:t>
                       </a:r>
                     </a:p>
@@ -3678,12 +3666,11 @@
                     <a:bodyPr/>
                     <a:lstStyle/>
                     <a:p>
-                      <a:pPr algn="ctr">
-                        <a:defRPr sz="1000">
-                          <a:latin typeface="Calibri"/>
-                        </a:defRPr>
-                      </a:pPr>
-                      <a:r>
+                      <a:pPr algn="ctr"/>
+                      <a:r>
+                        <a:rPr sz="1000">
+                          <a:latin typeface="Calibri"/>
+                        </a:rPr>
                         <a:t>1</a:t>
                       </a:r>
                     </a:p>
@@ -3695,12 +3682,11 @@
                     <a:bodyPr/>
                     <a:lstStyle/>
                     <a:p>
-                      <a:pPr algn="ctr">
-                        <a:defRPr sz="1000">
-                          <a:latin typeface="Calibri"/>
-                        </a:defRPr>
-                      </a:pPr>
-                      <a:r>
+                      <a:pPr algn="ctr"/>
+                      <a:r>
+                        <a:rPr sz="1000">
+                          <a:latin typeface="Calibri"/>
+                        </a:rPr>
                         <a:t>0.100</a:t>
                       </a:r>
                     </a:p>
@@ -3712,12 +3698,11 @@
                     <a:bodyPr/>
                     <a:lstStyle/>
                     <a:p>
-                      <a:pPr algn="ctr">
-                        <a:defRPr sz="1000">
-                          <a:latin typeface="Calibri"/>
-                        </a:defRPr>
-                      </a:pPr>
-                      <a:r>
+                      <a:pPr algn="ctr"/>
+                      <a:r>
+                        <a:rPr sz="1000">
+                          <a:latin typeface="Calibri"/>
+                        </a:rPr>
                         <a:t>-0.250</a:t>
                       </a:r>
                     </a:p>
@@ -3731,12 +3716,11 @@
                     <a:bodyPr/>
                     <a:lstStyle/>
                     <a:p>
-                      <a:pPr algn="ctr">
-                        <a:defRPr sz="1000">
-                          <a:latin typeface="Calibri"/>
-                        </a:defRPr>
-                      </a:pPr>
-                      <a:r>
+                      <a:pPr algn="ctr"/>
+                      <a:r>
+                        <a:rPr sz="1000">
+                          <a:latin typeface="Calibri"/>
+                        </a:rPr>
                         <a:t>CARE (1996)</a:t>
                       </a:r>
                     </a:p>
@@ -3752,12 +3736,11 @@
                     <a:bodyPr/>
                     <a:lstStyle/>
                     <a:p>
-                      <a:pPr algn="ctr">
-                        <a:defRPr sz="1000">
-                          <a:latin typeface="Calibri"/>
-                        </a:defRPr>
-                      </a:pPr>
-                      <a:r>
+                      <a:pPr algn="ctr"/>
+                      <a:r>
+                        <a:rPr sz="1000">
+                          <a:latin typeface="Calibri"/>
+                        </a:rPr>
                         <a:t>11</a:t>
                       </a:r>
                     </a:p>
@@ -3773,12 +3756,11 @@
                     <a:bodyPr/>
                     <a:lstStyle/>
                     <a:p>
-                      <a:pPr algn="ctr">
-                        <a:defRPr sz="1000">
-                          <a:latin typeface="Calibri"/>
-                        </a:defRPr>
-                      </a:pPr>
-                      <a:r>
+                      <a:pPr algn="ctr"/>
+                      <a:r>
+                        <a:rPr sz="1000">
+                          <a:latin typeface="Calibri"/>
+                        </a:rPr>
                         <a:t>1</a:t>
                       </a:r>
                     </a:p>
@@ -3794,12 +3776,11 @@
                     <a:bodyPr/>
                     <a:lstStyle/>
                     <a:p>
-                      <a:pPr algn="ctr">
-                        <a:defRPr sz="1000">
-                          <a:latin typeface="Calibri"/>
-                        </a:defRPr>
-                      </a:pPr>
-                      <a:r>
+                      <a:pPr algn="ctr"/>
+                      <a:r>
+                        <a:rPr sz="1000">
+                          <a:latin typeface="Calibri"/>
+                        </a:rPr>
                         <a:t>0.091</a:t>
                       </a:r>
                     </a:p>
@@ -3815,12 +3796,11 @@
                     <a:bodyPr/>
                     <a:lstStyle/>
                     <a:p>
-                      <a:pPr algn="ctr">
-                        <a:defRPr sz="1000">
-                          <a:latin typeface="Calibri"/>
-                        </a:defRPr>
-                      </a:pPr>
-                      <a:r>
+                      <a:pPr algn="ctr"/>
+                      <a:r>
+                        <a:rPr sz="1000">
+                          <a:latin typeface="Calibri"/>
+                        </a:rPr>
                         <a:t>-0.100</a:t>
                       </a:r>
                     </a:p>
@@ -3838,12 +3818,11 @@
                     <a:bodyPr/>
                     <a:lstStyle/>
                     <a:p>
-                      <a:pPr algn="ctr">
-                        <a:defRPr sz="1000">
-                          <a:latin typeface="Calibri"/>
-                        </a:defRPr>
-                      </a:pPr>
-                      <a:r>
+                      <a:pPr algn="ctr"/>
+                      <a:r>
+                        <a:rPr sz="1000">
+                          <a:latin typeface="Calibri"/>
+                        </a:rPr>
                         <a:t>LIPID (1998)</a:t>
                       </a:r>
                     </a:p>
@@ -3855,12 +3834,11 @@
                     <a:bodyPr/>
                     <a:lstStyle/>
                     <a:p>
-                      <a:pPr algn="ctr">
-                        <a:defRPr sz="1000">
-                          <a:latin typeface="Calibri"/>
-                        </a:defRPr>
-                      </a:pPr>
-                      <a:r>
+                      <a:pPr algn="ctr"/>
+                      <a:r>
+                        <a:rPr sz="1000">
+                          <a:latin typeface="Calibri"/>
+                        </a:rPr>
                         <a:t>10</a:t>
                       </a:r>
                     </a:p>
@@ -3872,12 +3850,11 @@
                     <a:bodyPr/>
                     <a:lstStyle/>
                     <a:p>
-                      <a:pPr algn="ctr">
-                        <a:defRPr sz="1000">
-                          <a:latin typeface="Calibri"/>
-                        </a:defRPr>
-                      </a:pPr>
-                      <a:r>
+                      <a:pPr algn="ctr"/>
+                      <a:r>
+                        <a:rPr sz="1000">
+                          <a:latin typeface="Calibri"/>
+                        </a:rPr>
                         <a:t>1</a:t>
                       </a:r>
                     </a:p>
@@ -3889,12 +3866,11 @@
                     <a:bodyPr/>
                     <a:lstStyle/>
                     <a:p>
-                      <a:pPr algn="ctr">
-                        <a:defRPr sz="1000">
-                          <a:latin typeface="Calibri"/>
-                        </a:defRPr>
-                      </a:pPr>
-                      <a:r>
+                      <a:pPr algn="ctr"/>
+                      <a:r>
+                        <a:rPr sz="1000">
+                          <a:latin typeface="Calibri"/>
+                        </a:rPr>
                         <a:t>0.100</a:t>
                       </a:r>
                     </a:p>
@@ -3906,12 +3882,11 @@
                     <a:bodyPr/>
                     <a:lstStyle/>
                     <a:p>
-                      <a:pPr algn="ctr">
-                        <a:defRPr sz="1000">
-                          <a:latin typeface="Calibri"/>
-                        </a:defRPr>
-                      </a:pPr>
-                      <a:r>
+                      <a:pPr algn="ctr"/>
+                      <a:r>
+                        <a:rPr sz="1000">
+                          <a:latin typeface="Calibri"/>
+                        </a:rPr>
                         <a:t>-0.250</a:t>
                       </a:r>
                     </a:p>
@@ -3925,12 +3900,11 @@
                     <a:bodyPr/>
                     <a:lstStyle/>
                     <a:p>
-                      <a:pPr algn="ctr">
-                        <a:defRPr sz="1000">
-                          <a:latin typeface="Calibri"/>
-                        </a:defRPr>
-                      </a:pPr>
-                      <a:r>
+                      <a:pPr algn="ctr"/>
+                      <a:r>
+                        <a:rPr sz="1000">
+                          <a:latin typeface="Calibri"/>
+                        </a:rPr>
                         <a:t>AFCAPS (1998)</a:t>
                       </a:r>
                     </a:p>
@@ -3946,12 +3920,11 @@
                     <a:bodyPr/>
                     <a:lstStyle/>
                     <a:p>
-                      <a:pPr algn="ctr">
-                        <a:defRPr sz="1000">
-                          <a:latin typeface="Calibri"/>
-                        </a:defRPr>
-                      </a:pPr>
-                      <a:r>
+                      <a:pPr algn="ctr"/>
+                      <a:r>
+                        <a:rPr sz="1000">
+                          <a:latin typeface="Calibri"/>
+                        </a:rPr>
                         <a:t>10</a:t>
                       </a:r>
                     </a:p>
@@ -3967,12 +3940,11 @@
                     <a:bodyPr/>
                     <a:lstStyle/>
                     <a:p>
-                      <a:pPr algn="ctr">
-                        <a:defRPr sz="1000">
-                          <a:latin typeface="Calibri"/>
-                        </a:defRPr>
-                      </a:pPr>
-                      <a:r>
+                      <a:pPr algn="ctr"/>
+                      <a:r>
+                        <a:rPr sz="1000">
+                          <a:latin typeface="Calibri"/>
+                        </a:rPr>
                         <a:t>1</a:t>
                       </a:r>
                     </a:p>
@@ -3988,12 +3960,11 @@
                     <a:bodyPr/>
                     <a:lstStyle/>
                     <a:p>
-                      <a:pPr algn="ctr">
-                        <a:defRPr sz="1000">
-                          <a:latin typeface="Calibri"/>
-                        </a:defRPr>
-                      </a:pPr>
-                      <a:r>
+                      <a:pPr algn="ctr"/>
+                      <a:r>
+                        <a:rPr sz="1000">
+                          <a:latin typeface="Calibri"/>
+                        </a:rPr>
                         <a:t>0.100</a:t>
                       </a:r>
                     </a:p>
@@ -4009,12 +3980,11 @@
                     <a:bodyPr/>
                     <a:lstStyle/>
                     <a:p>
-                      <a:pPr algn="ctr">
-                        <a:defRPr sz="1000">
-                          <a:latin typeface="Calibri"/>
-                        </a:defRPr>
-                      </a:pPr>
-                      <a:r>
+                      <a:pPr algn="ctr"/>
+                      <a:r>
+                        <a:rPr sz="1000">
+                          <a:latin typeface="Calibri"/>
+                        </a:rPr>
                         <a:t>-0.110</a:t>
                       </a:r>
                     </a:p>
@@ -4052,15 +4022,13 @@
           </a:bodyPr>
           <a:lstStyle/>
           <a:p>
-            <a:pPr>
-              <a:defRPr sz="1000" i="1">
+            <a:r>
+              <a:rPr sz="1000" i="1">
                 <a:solidFill>
                   <a:srgbClr val="666666"/>
                 </a:solidFill>
                 <a:latin typeface="Calibri"/>
-              </a:defRPr>
-            </a:pPr>
-            <a:r>
+              </a:rPr>
               <a:t>ICRD = 0.009, I² = 0.0%, Pooled = -0.251</a:t>
             </a:r>
           </a:p>
@@ -4148,15 +4116,14 @@
                     <a:bodyPr/>
                     <a:lstStyle/>
                     <a:p>
-                      <a:pPr algn="ctr">
-                        <a:defRPr sz="1100" b="1">
+                      <a:pPr algn="ctr"/>
+                      <a:r>
+                        <a:rPr sz="1100" b="1">
                           <a:solidFill>
                             <a:srgbClr val="FFFFFF"/>
                           </a:solidFill>
                           <a:latin typeface="Calibri"/>
-                        </a:defRPr>
-                      </a:pPr>
-                      <a:r>
+                        </a:rPr>
                         <a:t>Study</a:t>
                       </a:r>
                     </a:p>
@@ -4172,15 +4139,14 @@
                     <a:bodyPr/>
                     <a:lstStyle/>
                     <a:p>
-                      <a:pPr algn="ctr">
-                        <a:defRPr sz="1100" b="1">
+                      <a:pPr algn="ctr"/>
+                      <a:r>
+                        <a:rPr sz="1100" b="1">
                           <a:solidFill>
                             <a:srgbClr val="FFFFFF"/>
                           </a:solidFill>
                           <a:latin typeface="Calibri"/>
-                        </a:defRPr>
-                      </a:pPr>
-                      <a:r>
+                        </a:rPr>
                         <a:t>D</a:t>
                       </a:r>
                     </a:p>
@@ -4196,15 +4162,14 @@
                     <a:bodyPr/>
                     <a:lstStyle/>
                     <a:p>
-                      <a:pPr algn="ctr">
-                        <a:defRPr sz="1100" b="1">
+                      <a:pPr algn="ctr"/>
+                      <a:r>
+                        <a:rPr sz="1100" b="1">
                           <a:solidFill>
                             <a:srgbClr val="FFFFFF"/>
                           </a:solidFill>
                           <a:latin typeface="Calibri"/>
-                        </a:defRPr>
-                      </a:pPr>
-                      <a:r>
+                        </a:rPr>
                         <a:t>d</a:t>
                       </a:r>
                     </a:p>
@@ -4220,15 +4185,14 @@
                     <a:bodyPr/>
                     <a:lstStyle/>
                     <a:p>
-                      <a:pPr algn="ctr">
-                        <a:defRPr sz="1100" b="1">
+                      <a:pPr algn="ctr"/>
+                      <a:r>
+                        <a:rPr sz="1100" b="1">
                           <a:solidFill>
                             <a:srgbClr val="FFFFFF"/>
                           </a:solidFill>
                           <a:latin typeface="Calibri"/>
-                        </a:defRPr>
-                      </a:pPr>
-                      <a:r>
+                        </a:rPr>
                         <a:t>ICR_std</a:t>
                       </a:r>
                     </a:p>
@@ -4244,15 +4208,14 @@
                     <a:bodyPr/>
                     <a:lstStyle/>
                     <a:p>
-                      <a:pPr algn="ctr">
-                        <a:defRPr sz="1100" b="1">
+                      <a:pPr algn="ctr"/>
+                      <a:r>
+                        <a:rPr sz="1100" b="1">
                           <a:solidFill>
                             <a:srgbClr val="FFFFFF"/>
                           </a:solidFill>
                           <a:latin typeface="Calibri"/>
-                        </a:defRPr>
-                      </a:pPr>
-                      <a:r>
+                        </a:rPr>
                         <a:t>Effect Size</a:t>
                       </a:r>
                     </a:p>
@@ -4270,12 +4233,11 @@
                     <a:bodyPr/>
                     <a:lstStyle/>
                     <a:p>
-                      <a:pPr algn="ctr">
-                        <a:defRPr sz="1000">
-                          <a:latin typeface="Calibri"/>
-                        </a:defRPr>
-                      </a:pPr>
-                      <a:r>
+                      <a:pPr algn="ctr"/>
+                      <a:r>
+                        <a:rPr sz="1000">
+                          <a:latin typeface="Calibri"/>
+                        </a:rPr>
                         <a:t>UKPDS 33 (1998)</a:t>
                       </a:r>
                     </a:p>
@@ -4291,12 +4253,11 @@
                     <a:bodyPr/>
                     <a:lstStyle/>
                     <a:p>
-                      <a:pPr algn="ctr">
-                        <a:defRPr sz="1000">
-                          <a:latin typeface="Calibri"/>
-                        </a:defRPr>
-                      </a:pPr>
-                      <a:r>
+                      <a:pPr algn="ctr"/>
+                      <a:r>
+                        <a:rPr sz="1000">
+                          <a:latin typeface="Calibri"/>
+                        </a:rPr>
                         <a:t>8</a:t>
                       </a:r>
                     </a:p>
@@ -4312,12 +4273,11 @@
                     <a:bodyPr/>
                     <a:lstStyle/>
                     <a:p>
-                      <a:pPr algn="ctr">
-                        <a:defRPr sz="1000">
-                          <a:latin typeface="Calibri"/>
-                        </a:defRPr>
-                      </a:pPr>
-                      <a:r>
+                      <a:pPr algn="ctr"/>
+                      <a:r>
+                        <a:rPr sz="1000">
+                          <a:latin typeface="Calibri"/>
+                        </a:rPr>
                         <a:t>1</a:t>
                       </a:r>
                     </a:p>
@@ -4333,12 +4293,11 @@
                     <a:bodyPr/>
                     <a:lstStyle/>
                     <a:p>
-                      <a:pPr algn="ctr">
-                        <a:defRPr sz="1000">
-                          <a:latin typeface="Calibri"/>
-                        </a:defRPr>
-                      </a:pPr>
-                      <a:r>
+                      <a:pPr algn="ctr"/>
+                      <a:r>
+                        <a:rPr sz="1000">
+                          <a:latin typeface="Calibri"/>
+                        </a:rPr>
                         <a:t>0.125</a:t>
                       </a:r>
                     </a:p>
@@ -4354,12 +4313,11 @@
                     <a:bodyPr/>
                     <a:lstStyle/>
                     <a:p>
-                      <a:pPr algn="ctr">
-                        <a:defRPr sz="1000">
-                          <a:latin typeface="Calibri"/>
-                        </a:defRPr>
-                      </a:pPr>
-                      <a:r>
+                      <a:pPr algn="ctr"/>
+                      <a:r>
+                        <a:rPr sz="1000">
+                          <a:latin typeface="Calibri"/>
+                        </a:rPr>
                         <a:t>-0.060</a:t>
                       </a:r>
                     </a:p>
@@ -4377,12 +4335,11 @@
                     <a:bodyPr/>
                     <a:lstStyle/>
                     <a:p>
-                      <a:pPr algn="ctr">
-                        <a:defRPr sz="1000">
-                          <a:latin typeface="Calibri"/>
-                        </a:defRPr>
-                      </a:pPr>
-                      <a:r>
+                      <a:pPr algn="ctr"/>
+                      <a:r>
+                        <a:rPr sz="1000">
+                          <a:latin typeface="Calibri"/>
+                        </a:rPr>
                         <a:t>ACCORD (2008)</a:t>
                       </a:r>
                     </a:p>
@@ -4394,12 +4351,11 @@
                     <a:bodyPr/>
                     <a:lstStyle/>
                     <a:p>
-                      <a:pPr algn="ctr">
-                        <a:defRPr sz="1000">
-                          <a:latin typeface="Calibri"/>
-                        </a:defRPr>
-                      </a:pPr>
-                      <a:r>
+                      <a:pPr algn="ctr"/>
+                      <a:r>
+                        <a:rPr sz="1000">
+                          <a:latin typeface="Calibri"/>
+                        </a:rPr>
                         <a:t>13</a:t>
                       </a:r>
                     </a:p>
@@ -4411,12 +4367,11 @@
                     <a:bodyPr/>
                     <a:lstStyle/>
                     <a:p>
-                      <a:pPr algn="ctr">
-                        <a:defRPr sz="1000">
-                          <a:latin typeface="Calibri"/>
-                        </a:defRPr>
-                      </a:pPr>
-                      <a:r>
+                      <a:pPr algn="ctr"/>
+                      <a:r>
+                        <a:rPr sz="1000">
+                          <a:latin typeface="Calibri"/>
+                        </a:rPr>
                         <a:t>1</a:t>
                       </a:r>
                     </a:p>
@@ -4428,12 +4383,11 @@
                     <a:bodyPr/>
                     <a:lstStyle/>
                     <a:p>
-                      <a:pPr algn="ctr">
-                        <a:defRPr sz="1000">
-                          <a:latin typeface="Calibri"/>
-                        </a:defRPr>
-                      </a:pPr>
-                      <a:r>
+                      <a:pPr algn="ctr"/>
+                      <a:r>
+                        <a:rPr sz="1000">
+                          <a:latin typeface="Calibri"/>
+                        </a:rPr>
                         <a:t>0.077</a:t>
                       </a:r>
                     </a:p>
@@ -4445,12 +4399,11 @@
                     <a:bodyPr/>
                     <a:lstStyle/>
                     <a:p>
-                      <a:pPr algn="ctr">
-                        <a:defRPr sz="1000">
-                          <a:latin typeface="Calibri"/>
-                        </a:defRPr>
-                      </a:pPr>
-                      <a:r>
+                      <a:pPr algn="ctr"/>
+                      <a:r>
+                        <a:rPr sz="1000">
+                          <a:latin typeface="Calibri"/>
+                        </a:rPr>
                         <a:t>+0.220</a:t>
                       </a:r>
                     </a:p>
@@ -4464,12 +4417,11 @@
                     <a:bodyPr/>
                     <a:lstStyle/>
                     <a:p>
-                      <a:pPr algn="ctr">
-                        <a:defRPr sz="1000">
-                          <a:latin typeface="Calibri"/>
-                        </a:defRPr>
-                      </a:pPr>
-                      <a:r>
+                      <a:pPr algn="ctr"/>
+                      <a:r>
+                        <a:rPr sz="1000">
+                          <a:latin typeface="Calibri"/>
+                        </a:rPr>
                         <a:t>ADVANCE (2008)</a:t>
                       </a:r>
                     </a:p>
@@ -4485,12 +4437,11 @@
                     <a:bodyPr/>
                     <a:lstStyle/>
                     <a:p>
-                      <a:pPr algn="ctr">
-                        <a:defRPr sz="1000">
-                          <a:latin typeface="Calibri"/>
-                        </a:defRPr>
-                      </a:pPr>
-                      <a:r>
+                      <a:pPr algn="ctr"/>
+                      <a:r>
+                        <a:rPr sz="1000">
+                          <a:latin typeface="Calibri"/>
+                        </a:rPr>
                         <a:t>12</a:t>
                       </a:r>
                     </a:p>
@@ -4506,12 +4457,11 @@
                     <a:bodyPr/>
                     <a:lstStyle/>
                     <a:p>
-                      <a:pPr algn="ctr">
-                        <a:defRPr sz="1000">
-                          <a:latin typeface="Calibri"/>
-                        </a:defRPr>
-                      </a:pPr>
-                      <a:r>
+                      <a:pPr algn="ctr"/>
+                      <a:r>
+                        <a:rPr sz="1000">
+                          <a:latin typeface="Calibri"/>
+                        </a:rPr>
                         <a:t>1</a:t>
                       </a:r>
                     </a:p>
@@ -4527,12 +4477,11 @@
                     <a:bodyPr/>
                     <a:lstStyle/>
                     <a:p>
-                      <a:pPr algn="ctr">
-                        <a:defRPr sz="1000">
-                          <a:latin typeface="Calibri"/>
-                        </a:defRPr>
-                      </a:pPr>
-                      <a:r>
+                      <a:pPr algn="ctr"/>
+                      <a:r>
+                        <a:rPr sz="1000">
+                          <a:latin typeface="Calibri"/>
+                        </a:rPr>
                         <a:t>0.083</a:t>
                       </a:r>
                     </a:p>
@@ -4548,12 +4497,11 @@
                     <a:bodyPr/>
                     <a:lstStyle/>
                     <a:p>
-                      <a:pPr algn="ctr">
-                        <a:defRPr sz="1000">
-                          <a:latin typeface="Calibri"/>
-                        </a:defRPr>
-                      </a:pPr>
-                      <a:r>
+                      <a:pPr algn="ctr"/>
+                      <a:r>
+                        <a:rPr sz="1000">
+                          <a:latin typeface="Calibri"/>
+                        </a:rPr>
                         <a:t>-0.070</a:t>
                       </a:r>
                     </a:p>
@@ -4571,12 +4519,11 @@
                     <a:bodyPr/>
                     <a:lstStyle/>
                     <a:p>
-                      <a:pPr algn="ctr">
-                        <a:defRPr sz="1000">
-                          <a:latin typeface="Calibri"/>
-                        </a:defRPr>
-                      </a:pPr>
-                      <a:r>
+                      <a:pPr algn="ctr"/>
+                      <a:r>
+                        <a:rPr sz="1000">
+                          <a:latin typeface="Calibri"/>
+                        </a:rPr>
                         <a:t>VADT (2009)</a:t>
                       </a:r>
                     </a:p>
@@ -4588,12 +4535,11 @@
                     <a:bodyPr/>
                     <a:lstStyle/>
                     <a:p>
-                      <a:pPr algn="ctr">
-                        <a:defRPr sz="1000">
-                          <a:latin typeface="Calibri"/>
-                        </a:defRPr>
-                      </a:pPr>
-                      <a:r>
+                      <a:pPr algn="ctr"/>
+                      <a:r>
+                        <a:rPr sz="1000">
+                          <a:latin typeface="Calibri"/>
+                        </a:rPr>
                         <a:t>12</a:t>
                       </a:r>
                     </a:p>
@@ -4605,12 +4551,11 @@
                     <a:bodyPr/>
                     <a:lstStyle/>
                     <a:p>
-                      <a:pPr algn="ctr">
-                        <a:defRPr sz="1000">
-                          <a:latin typeface="Calibri"/>
-                        </a:defRPr>
-                      </a:pPr>
-                      <a:r>
+                      <a:pPr algn="ctr"/>
+                      <a:r>
+                        <a:rPr sz="1000">
+                          <a:latin typeface="Calibri"/>
+                        </a:rPr>
                         <a:t>1</a:t>
                       </a:r>
                     </a:p>
@@ -4622,12 +4567,11 @@
                     <a:bodyPr/>
                     <a:lstStyle/>
                     <a:p>
-                      <a:pPr algn="ctr">
-                        <a:defRPr sz="1000">
-                          <a:latin typeface="Calibri"/>
-                        </a:defRPr>
-                      </a:pPr>
-                      <a:r>
+                      <a:pPr algn="ctr"/>
+                      <a:r>
+                        <a:rPr sz="1000">
+                          <a:latin typeface="Calibri"/>
+                        </a:rPr>
                         <a:t>0.083</a:t>
                       </a:r>
                     </a:p>
@@ -4639,12 +4583,11 @@
                     <a:bodyPr/>
                     <a:lstStyle/>
                     <a:p>
-                      <a:pPr algn="ctr">
-                        <a:defRPr sz="1000">
-                          <a:latin typeface="Calibri"/>
-                        </a:defRPr>
-                      </a:pPr>
-                      <a:r>
+                      <a:pPr algn="ctr"/>
+                      <a:r>
+                        <a:rPr sz="1000">
+                          <a:latin typeface="Calibri"/>
+                        </a:rPr>
                         <a:t>-0.020</a:t>
                       </a:r>
                     </a:p>
@@ -4678,15 +4621,13 @@
           </a:bodyPr>
           <a:lstStyle/>
           <a:p>
-            <a:pPr>
-              <a:defRPr sz="1000" i="1">
+            <a:r>
+              <a:rPr sz="1000" i="1">
                 <a:solidFill>
                   <a:srgbClr val="666666"/>
                 </a:solidFill>
                 <a:latin typeface="Calibri"/>
-              </a:defRPr>
-            </a:pPr>
-            <a:r>
+              </a:rPr>
               <a:t>ICRD = 0.048, I² = 17.0%, Pooled = -0.003</a:t>
             </a:r>
           </a:p>
@@ -4851,15 +4792,14 @@
                     <a:bodyPr/>
                     <a:lstStyle/>
                     <a:p>
-                      <a:pPr algn="ctr">
-                        <a:defRPr sz="1100" b="1">
+                      <a:pPr algn="ctr"/>
+                      <a:r>
+                        <a:rPr sz="1100" b="1">
                           <a:solidFill>
                             <a:srgbClr val="FFFFFF"/>
                           </a:solidFill>
                           <a:latin typeface="Calibri"/>
-                        </a:defRPr>
-                      </a:pPr>
-                      <a:r>
+                        </a:rPr>
                         <a:t>Country</a:t>
                       </a:r>
                     </a:p>
@@ -4875,15 +4815,14 @@
                     <a:bodyPr/>
                     <a:lstStyle/>
                     <a:p>
-                      <a:pPr algn="ctr">
-                        <a:defRPr sz="1100" b="1">
+                      <a:pPr algn="ctr"/>
+                      <a:r>
+                        <a:rPr sz="1100" b="1">
                           <a:solidFill>
                             <a:srgbClr val="FFFFFF"/>
                           </a:solidFill>
                           <a:latin typeface="Calibri"/>
-                        </a:defRPr>
-                      </a:pPr>
-                      <a:r>
+                        </a:rPr>
                         <a:t>n</a:t>
                       </a:r>
                     </a:p>
@@ -4899,15 +4838,14 @@
                     <a:bodyPr/>
                     <a:lstStyle/>
                     <a:p>
-                      <a:pPr algn="ctr">
-                        <a:defRPr sz="1100" b="1">
+                      <a:pPr algn="ctr"/>
+                      <a:r>
+                        <a:rPr sz="1100" b="1">
                           <a:solidFill>
                             <a:srgbClr val="FFFFFF"/>
                           </a:solidFill>
                           <a:latin typeface="Calibri"/>
-                        </a:defRPr>
-                      </a:pPr>
-                      <a:r>
+                        </a:rPr>
                         <a:t>Mortality</a:t>
                       </a:r>
                     </a:p>
@@ -4923,15 +4861,14 @@
                     <a:bodyPr/>
                     <a:lstStyle/>
                     <a:p>
-                      <a:pPr algn="ctr">
-                        <a:defRPr sz="1100" b="1">
+                      <a:pPr algn="ctr"/>
+                      <a:r>
+                        <a:rPr sz="1100" b="1">
                           <a:solidFill>
                             <a:srgbClr val="FFFFFF"/>
                           </a:solidFill>
                           <a:latin typeface="Calibri"/>
-                        </a:defRPr>
-                      </a:pPr>
-                      <a:r>
+                        </a:rPr>
                         <a:t>ICR_std</a:t>
                       </a:r>
                     </a:p>
@@ -4947,15 +4884,14 @@
                     <a:bodyPr/>
                     <a:lstStyle/>
                     <a:p>
-                      <a:pPr algn="ctr">
-                        <a:defRPr sz="1100" b="1">
+                      <a:pPr algn="ctr"/>
+                      <a:r>
+                        <a:rPr sz="1100" b="1">
                           <a:solidFill>
                             <a:srgbClr val="FFFFFF"/>
                           </a:solidFill>
                           <a:latin typeface="Calibri"/>
-                        </a:defRPr>
-                      </a:pPr>
-                      <a:r>
+                        </a:rPr>
                         <a:t>ICR_pca (loading)</a:t>
                       </a:r>
                     </a:p>
@@ -4971,15 +4907,14 @@
                     <a:bodyPr/>
                     <a:lstStyle/>
                     <a:p>
-                      <a:pPr algn="ctr">
-                        <a:defRPr sz="1100" b="1">
+                      <a:pPr algn="ctr"/>
+                      <a:r>
+                        <a:rPr sz="1100" b="1">
                           <a:solidFill>
                             <a:srgbClr val="FFFFFF"/>
                           </a:solidFill>
                           <a:latin typeface="Calibri"/>
-                        </a:defRPr>
-                      </a:pPr>
-                      <a:r>
+                        </a:rPr>
                         <a:t>ICR_pca (reg)</a:t>
                       </a:r>
                     </a:p>
@@ -4995,15 +4930,14 @@
                     <a:bodyPr/>
                     <a:lstStyle/>
                     <a:p>
-                      <a:pPr algn="ctr">
-                        <a:defRPr sz="1100" b="1">
+                      <a:pPr algn="ctr"/>
+                      <a:r>
+                        <a:rPr sz="1100" b="1">
                           <a:solidFill>
                             <a:srgbClr val="FFFFFF"/>
                           </a:solidFill>
                           <a:latin typeface="Calibri"/>
-                        </a:defRPr>
-                      </a:pPr>
-                      <a:r>
+                        </a:rPr>
                         <a:t>PCs</a:t>
                       </a:r>
                     </a:p>
@@ -5021,12 +4955,11 @@
                     <a:bodyPr/>
                     <a:lstStyle/>
                     <a:p>
-                      <a:pPr algn="ctr">
-                        <a:defRPr sz="1000">
-                          <a:latin typeface="Calibri"/>
-                        </a:defRPr>
-                      </a:pPr>
-                      <a:r>
+                      <a:pPr algn="ctr"/>
+                      <a:r>
+                        <a:rPr sz="1000">
+                          <a:latin typeface="Calibri"/>
+                        </a:rPr>
                         <a:t>UK</a:t>
                       </a:r>
                     </a:p>
@@ -5042,12 +4975,11 @@
                     <a:bodyPr/>
                     <a:lstStyle/>
                     <a:p>
-                      <a:pPr algn="ctr">
-                        <a:defRPr sz="1000">
-                          <a:latin typeface="Calibri"/>
-                        </a:defRPr>
-                      </a:pPr>
-                      <a:r>
+                      <a:pPr algn="ctr"/>
+                      <a:r>
+                        <a:rPr sz="1000">
+                          <a:latin typeface="Calibri"/>
+                        </a:rPr>
                         <a:t>5,787</a:t>
                       </a:r>
                     </a:p>
@@ -5063,12 +4995,11 @@
                     <a:bodyPr/>
                     <a:lstStyle/>
                     <a:p>
-                      <a:pPr algn="ctr">
-                        <a:defRPr sz="1000">
-                          <a:latin typeface="Calibri"/>
-                        </a:defRPr>
-                      </a:pPr>
-                      <a:r>
+                      <a:pPr algn="ctr"/>
+                      <a:r>
+                        <a:rPr sz="1000">
+                          <a:latin typeface="Calibri"/>
+                        </a:rPr>
                         <a:t>28.6%</a:t>
                       </a:r>
                     </a:p>
@@ -5084,12 +5015,11 @@
                     <a:bodyPr/>
                     <a:lstStyle/>
                     <a:p>
-                      <a:pPr algn="ctr">
-                        <a:defRPr sz="1000">
-                          <a:latin typeface="Calibri"/>
-                        </a:defRPr>
-                      </a:pPr>
-                      <a:r>
+                      <a:pPr algn="ctr"/>
+                      <a:r>
+                        <a:rPr sz="1000">
+                          <a:latin typeface="Calibri"/>
+                        </a:rPr>
                         <a:t>0.040</a:t>
                       </a:r>
                     </a:p>
@@ -5105,12 +5035,11 @@
                     <a:bodyPr/>
                     <a:lstStyle/>
                     <a:p>
-                      <a:pPr algn="ctr">
-                        <a:defRPr sz="1000">
-                          <a:latin typeface="Calibri"/>
-                        </a:defRPr>
-                      </a:pPr>
-                      <a:r>
+                      <a:pPr algn="ctr"/>
+                      <a:r>
+                        <a:rPr sz="1000">
+                          <a:latin typeface="Calibri"/>
+                        </a:rPr>
                         <a:t>0.138</a:t>
                       </a:r>
                     </a:p>
@@ -5126,12 +5055,11 @@
                     <a:bodyPr/>
                     <a:lstStyle/>
                     <a:p>
-                      <a:pPr algn="ctr">
-                        <a:defRPr sz="1000">
-                          <a:latin typeface="Calibri"/>
-                        </a:defRPr>
-                      </a:pPr>
-                      <a:r>
+                      <a:pPr algn="ctr"/>
+                      <a:r>
+                        <a:rPr sz="1000">
+                          <a:latin typeface="Calibri"/>
+                        </a:rPr>
                         <a:t>0.00162</a:t>
                       </a:r>
                     </a:p>
@@ -5147,12 +5075,11 @@
                     <a:bodyPr/>
                     <a:lstStyle/>
                     <a:p>
-                      <a:pPr algn="ctr">
-                        <a:defRPr sz="1000">
-                          <a:latin typeface="Calibri"/>
-                        </a:defRPr>
-                      </a:pPr>
-                      <a:r>
+                      <a:pPr algn="ctr"/>
+                      <a:r>
+                        <a:rPr sz="1000">
+                          <a:latin typeface="Calibri"/>
+                        </a:rPr>
                         <a:t>4</a:t>
                       </a:r>
                     </a:p>
@@ -5170,12 +5097,11 @@
                     <a:bodyPr/>
                     <a:lstStyle/>
                     <a:p>
-                      <a:pPr algn="ctr">
-                        <a:defRPr sz="1000">
-                          <a:latin typeface="Calibri"/>
-                        </a:defRPr>
-                      </a:pPr>
-                      <a:r>
+                      <a:pPr algn="ctr"/>
+                      <a:r>
+                        <a:rPr sz="1000">
+                          <a:latin typeface="Calibri"/>
+                        </a:rPr>
                         <a:t>Italy</a:t>
                       </a:r>
                     </a:p>
@@ -5187,12 +5113,11 @@
                     <a:bodyPr/>
                     <a:lstStyle/>
                     <a:p>
-                      <a:pPr algn="ctr">
-                        <a:defRPr sz="1000">
-                          <a:latin typeface="Calibri"/>
-                        </a:defRPr>
-                      </a:pPr>
-                      <a:r>
+                      <a:pPr algn="ctr"/>
+                      <a:r>
+                        <a:rPr sz="1000">
+                          <a:latin typeface="Calibri"/>
+                        </a:rPr>
                         <a:t>3,112</a:t>
                       </a:r>
                     </a:p>
@@ -5204,12 +5129,11 @@
                     <a:bodyPr/>
                     <a:lstStyle/>
                     <a:p>
-                      <a:pPr algn="ctr">
-                        <a:defRPr sz="1000">
-                          <a:latin typeface="Calibri"/>
-                        </a:defRPr>
-                      </a:pPr>
-                      <a:r>
+                      <a:pPr algn="ctr"/>
+                      <a:r>
+                        <a:rPr sz="1000">
+                          <a:latin typeface="Calibri"/>
+                        </a:rPr>
                         <a:t>20.0%</a:t>
                       </a:r>
                     </a:p>
@@ -5221,12 +5145,11 @@
                     <a:bodyPr/>
                     <a:lstStyle/>
                     <a:p>
-                      <a:pPr algn="ctr">
-                        <a:defRPr sz="1000">
-                          <a:latin typeface="Calibri"/>
-                        </a:defRPr>
-                      </a:pPr>
-                      <a:r>
+                      <a:pPr algn="ctr"/>
+                      <a:r>
+                        <a:rPr sz="1000">
+                          <a:latin typeface="Calibri"/>
+                        </a:rPr>
                         <a:t>0.040</a:t>
                       </a:r>
                     </a:p>
@@ -5238,12 +5161,11 @@
                     <a:bodyPr/>
                     <a:lstStyle/>
                     <a:p>
-                      <a:pPr algn="ctr">
-                        <a:defRPr sz="1000">
-                          <a:latin typeface="Calibri"/>
-                        </a:defRPr>
-                      </a:pPr>
-                      <a:r>
+                      <a:pPr algn="ctr"/>
+                      <a:r>
+                        <a:rPr sz="1000">
+                          <a:latin typeface="Calibri"/>
+                        </a:rPr>
                         <a:t>0.046</a:t>
                       </a:r>
                     </a:p>
@@ -5255,12 +5177,11 @@
                     <a:bodyPr/>
                     <a:lstStyle/>
                     <a:p>
-                      <a:pPr algn="ctr">
-                        <a:defRPr sz="1000">
-                          <a:latin typeface="Calibri"/>
-                        </a:defRPr>
-                      </a:pPr>
-                      <a:r>
+                      <a:pPr algn="ctr"/>
+                      <a:r>
+                        <a:rPr sz="1000">
+                          <a:latin typeface="Calibri"/>
+                        </a:rPr>
                         <a:t>0.00153</a:t>
                       </a:r>
                     </a:p>
@@ -5272,12 +5193,11 @@
                     <a:bodyPr/>
                     <a:lstStyle/>
                     <a:p>
-                      <a:pPr algn="ctr">
-                        <a:defRPr sz="1000">
-                          <a:latin typeface="Calibri"/>
-                        </a:defRPr>
-                      </a:pPr>
-                      <a:r>
+                      <a:pPr algn="ctr"/>
+                      <a:r>
+                        <a:rPr sz="1000">
+                          <a:latin typeface="Calibri"/>
+                        </a:rPr>
                         <a:t>2</a:t>
                       </a:r>
                     </a:p>
@@ -5291,12 +5211,11 @@
                     <a:bodyPr/>
                     <a:lstStyle/>
                     <a:p>
-                      <a:pPr algn="ctr">
-                        <a:defRPr sz="1000">
-                          <a:latin typeface="Calibri"/>
-                        </a:defRPr>
-                      </a:pPr>
-                      <a:r>
+                      <a:pPr algn="ctr"/>
+                      <a:r>
+                        <a:rPr sz="1000">
+                          <a:latin typeface="Calibri"/>
+                        </a:rPr>
                         <a:t>Switzerland</a:t>
                       </a:r>
                     </a:p>
@@ -5312,12 +5231,11 @@
                     <a:bodyPr/>
                     <a:lstStyle/>
                     <a:p>
-                      <a:pPr algn="ctr">
-                        <a:defRPr sz="1000">
-                          <a:latin typeface="Calibri"/>
-                        </a:defRPr>
-                      </a:pPr>
-                      <a:r>
+                      <a:pPr algn="ctr"/>
+                      <a:r>
+                        <a:rPr sz="1000">
+                          <a:latin typeface="Calibri"/>
+                        </a:rPr>
                         <a:t>1,631</a:t>
                       </a:r>
                     </a:p>
@@ -5333,12 +5251,11 @@
                     <a:bodyPr/>
                     <a:lstStyle/>
                     <a:p>
-                      <a:pPr algn="ctr">
-                        <a:defRPr sz="1000">
-                          <a:latin typeface="Calibri"/>
-                        </a:defRPr>
-                      </a:pPr>
-                      <a:r>
+                      <a:pPr algn="ctr"/>
+                      <a:r>
+                        <a:rPr sz="1000">
+                          <a:latin typeface="Calibri"/>
+                        </a:rPr>
                         <a:t>23.1%</a:t>
                       </a:r>
                     </a:p>
@@ -5354,12 +5271,11 @@
                     <a:bodyPr/>
                     <a:lstStyle/>
                     <a:p>
-                      <a:pPr algn="ctr">
-                        <a:defRPr sz="1000">
-                          <a:latin typeface="Calibri"/>
-                        </a:defRPr>
-                      </a:pPr>
-                      <a:r>
+                      <a:pPr algn="ctr"/>
+                      <a:r>
+                        <a:rPr sz="1000">
+                          <a:latin typeface="Calibri"/>
+                        </a:rPr>
                         <a:t>0.040</a:t>
                       </a:r>
                     </a:p>
@@ -5375,12 +5291,11 @@
                     <a:bodyPr/>
                     <a:lstStyle/>
                     <a:p>
-                      <a:pPr algn="ctr">
-                        <a:defRPr sz="1000">
-                          <a:latin typeface="Calibri"/>
-                        </a:defRPr>
-                      </a:pPr>
-                      <a:r>
+                      <a:pPr algn="ctr"/>
+                      <a:r>
+                        <a:rPr sz="1000">
+                          <a:latin typeface="Calibri"/>
+                        </a:rPr>
                         <a:t>0.121</a:t>
                       </a:r>
                     </a:p>
@@ -5396,12 +5311,11 @@
                     <a:bodyPr/>
                     <a:lstStyle/>
                     <a:p>
-                      <a:pPr algn="ctr">
-                        <a:defRPr sz="1000">
-                          <a:latin typeface="Calibri"/>
-                        </a:defRPr>
-                      </a:pPr>
-                      <a:r>
+                      <a:pPr algn="ctr"/>
+                      <a:r>
+                        <a:rPr sz="1000">
+                          <a:latin typeface="Calibri"/>
+                        </a:rPr>
                         <a:t>0.00135</a:t>
                       </a:r>
                     </a:p>
@@ -5417,12 +5331,11 @@
                     <a:bodyPr/>
                     <a:lstStyle/>
                     <a:p>
-                      <a:pPr algn="ctr">
-                        <a:defRPr sz="1000">
-                          <a:latin typeface="Calibri"/>
-                        </a:defRPr>
-                      </a:pPr>
-                      <a:r>
+                      <a:pPr algn="ctr"/>
+                      <a:r>
+                        <a:rPr sz="1000">
+                          <a:latin typeface="Calibri"/>
+                        </a:rPr>
                         <a:t>4</a:t>
                       </a:r>
                     </a:p>
@@ -5440,12 +5353,11 @@
                     <a:bodyPr/>
                     <a:lstStyle/>
                     <a:p>
-                      <a:pPr algn="ctr">
-                        <a:defRPr sz="1000">
-                          <a:latin typeface="Calibri"/>
-                        </a:defRPr>
-                      </a:pPr>
-                      <a:r>
+                      <a:pPr algn="ctr"/>
+                      <a:r>
+                        <a:rPr sz="1000">
+                          <a:latin typeface="Calibri"/>
+                        </a:rPr>
                         <a:t>Poland</a:t>
                       </a:r>
                     </a:p>
@@ -5457,12 +5369,11 @@
                     <a:bodyPr/>
                     <a:lstStyle/>
                     <a:p>
-                      <a:pPr algn="ctr">
-                        <a:defRPr sz="1000">
-                          <a:latin typeface="Calibri"/>
-                        </a:defRPr>
-                      </a:pPr>
-                      <a:r>
+                      <a:pPr algn="ctr"/>
+                      <a:r>
+                        <a:rPr sz="1000">
+                          <a:latin typeface="Calibri"/>
+                        </a:rPr>
                         <a:t>759</a:t>
                       </a:r>
                     </a:p>
@@ -5474,12 +5385,11 @@
                     <a:bodyPr/>
                     <a:lstStyle/>
                     <a:p>
-                      <a:pPr algn="ctr">
-                        <a:defRPr sz="1000">
-                          <a:latin typeface="Calibri"/>
-                        </a:defRPr>
-                      </a:pPr>
-                      <a:r>
+                      <a:pPr algn="ctr"/>
+                      <a:r>
+                        <a:rPr sz="1000">
+                          <a:latin typeface="Calibri"/>
+                        </a:rPr>
                         <a:t>29.6%</a:t>
                       </a:r>
                     </a:p>
@@ -5491,12 +5401,11 @@
                     <a:bodyPr/>
                     <a:lstStyle/>
                     <a:p>
-                      <a:pPr algn="ctr">
-                        <a:defRPr sz="1000">
-                          <a:latin typeface="Calibri"/>
-                        </a:defRPr>
-                      </a:pPr>
-                      <a:r>
+                      <a:pPr algn="ctr"/>
+                      <a:r>
+                        <a:rPr sz="1000">
+                          <a:latin typeface="Calibri"/>
+                        </a:rPr>
                         <a:t>0.040</a:t>
                       </a:r>
                     </a:p>
@@ -5508,12 +5417,11 @@
                     <a:bodyPr/>
                     <a:lstStyle/>
                     <a:p>
-                      <a:pPr algn="ctr">
-                        <a:defRPr sz="1000">
-                          <a:latin typeface="Calibri"/>
-                        </a:defRPr>
-                      </a:pPr>
-                      <a:r>
+                      <a:pPr algn="ctr"/>
+                      <a:r>
+                        <a:rPr sz="1000">
+                          <a:latin typeface="Calibri"/>
+                        </a:rPr>
                         <a:t>0.139</a:t>
                       </a:r>
                     </a:p>
@@ -5525,12 +5433,11 @@
                     <a:bodyPr/>
                     <a:lstStyle/>
                     <a:p>
-                      <a:pPr algn="ctr">
-                        <a:defRPr sz="1000">
-                          <a:latin typeface="Calibri"/>
-                        </a:defRPr>
-                      </a:pPr>
-                      <a:r>
+                      <a:pPr algn="ctr"/>
+                      <a:r>
+                        <a:rPr sz="1000">
+                          <a:latin typeface="Calibri"/>
+                        </a:rPr>
                         <a:t>0.00230</a:t>
                       </a:r>
                     </a:p>
@@ -5542,12 +5449,11 @@
                     <a:bodyPr/>
                     <a:lstStyle/>
                     <a:p>
-                      <a:pPr algn="ctr">
-                        <a:defRPr sz="1000">
-                          <a:latin typeface="Calibri"/>
-                        </a:defRPr>
-                      </a:pPr>
-                      <a:r>
+                      <a:pPr algn="ctr"/>
+                      <a:r>
+                        <a:rPr sz="1000">
+                          <a:latin typeface="Calibri"/>
+                        </a:rPr>
                         <a:t>4</a:t>
                       </a:r>
                     </a:p>
@@ -5561,12 +5467,11 @@
                     <a:bodyPr/>
                     <a:lstStyle/>
                     <a:p>
-                      <a:pPr algn="ctr">
-                        <a:defRPr sz="1000">
-                          <a:latin typeface="Calibri"/>
-                        </a:defRPr>
-                      </a:pPr>
-                      <a:r>
+                      <a:pPr algn="ctr"/>
+                      <a:r>
+                        <a:rPr sz="1000">
+                          <a:latin typeface="Calibri"/>
+                        </a:rPr>
                         <a:t>Netherlands</a:t>
                       </a:r>
                     </a:p>
@@ -5582,12 +5487,11 @@
                     <a:bodyPr/>
                     <a:lstStyle/>
                     <a:p>
-                      <a:pPr algn="ctr">
-                        <a:defRPr sz="1000">
-                          <a:latin typeface="Calibri"/>
-                        </a:defRPr>
-                      </a:pPr>
-                      <a:r>
+                      <a:pPr algn="ctr"/>
+                      <a:r>
+                        <a:rPr sz="1000">
+                          <a:latin typeface="Calibri"/>
+                        </a:rPr>
                         <a:t>728</a:t>
                       </a:r>
                     </a:p>
@@ -5603,12 +5507,11 @@
                     <a:bodyPr/>
                     <a:lstStyle/>
                     <a:p>
-                      <a:pPr algn="ctr">
-                        <a:defRPr sz="1000">
-                          <a:latin typeface="Calibri"/>
-                        </a:defRPr>
-                      </a:pPr>
-                      <a:r>
+                      <a:pPr algn="ctr"/>
+                      <a:r>
+                        <a:rPr sz="1000">
+                          <a:latin typeface="Calibri"/>
+                        </a:rPr>
                         <a:t>18.3%</a:t>
                       </a:r>
                     </a:p>
@@ -5624,12 +5527,11 @@
                     <a:bodyPr/>
                     <a:lstStyle/>
                     <a:p>
-                      <a:pPr algn="ctr">
-                        <a:defRPr sz="1000">
-                          <a:latin typeface="Calibri"/>
-                        </a:defRPr>
-                      </a:pPr>
-                      <a:r>
+                      <a:pPr algn="ctr"/>
+                      <a:r>
+                        <a:rPr sz="1000">
+                          <a:latin typeface="Calibri"/>
+                        </a:rPr>
                         <a:t>0.040</a:t>
                       </a:r>
                     </a:p>
@@ -5645,12 +5547,11 @@
                     <a:bodyPr/>
                     <a:lstStyle/>
                     <a:p>
-                      <a:pPr algn="ctr">
-                        <a:defRPr sz="1000">
-                          <a:latin typeface="Calibri"/>
-                        </a:defRPr>
-                      </a:pPr>
-                      <a:r>
+                      <a:pPr algn="ctr"/>
+                      <a:r>
+                        <a:rPr sz="1000">
+                          <a:latin typeface="Calibri"/>
+                        </a:rPr>
                         <a:t>0.180</a:t>
                       </a:r>
                     </a:p>
@@ -5666,12 +5567,11 @@
                     <a:bodyPr/>
                     <a:lstStyle/>
                     <a:p>
-                      <a:pPr algn="ctr">
-                        <a:defRPr sz="1000">
-                          <a:latin typeface="Calibri"/>
-                        </a:defRPr>
-                      </a:pPr>
-                      <a:r>
+                      <a:pPr algn="ctr"/>
+                      <a:r>
+                        <a:rPr sz="1000">
+                          <a:latin typeface="Calibri"/>
+                        </a:rPr>
                         <a:t>0.00136</a:t>
                       </a:r>
                     </a:p>
@@ -5687,12 +5587,11 @@
                     <a:bodyPr/>
                     <a:lstStyle/>
                     <a:p>
-                      <a:pPr algn="ctr">
-                        <a:defRPr sz="1000">
-                          <a:latin typeface="Calibri"/>
-                        </a:defRPr>
-                      </a:pPr>
-                      <a:r>
+                      <a:pPr algn="ctr"/>
+                      <a:r>
+                        <a:rPr sz="1000">
+                          <a:latin typeface="Calibri"/>
+                        </a:rPr>
                         <a:t>5</a:t>
                       </a:r>
                     </a:p>
@@ -5710,12 +5609,11 @@
                     <a:bodyPr/>
                     <a:lstStyle/>
                     <a:p>
-                      <a:pPr algn="ctr">
-                        <a:defRPr sz="1000">
-                          <a:latin typeface="Calibri"/>
-                        </a:defRPr>
-                      </a:pPr>
-                      <a:r>
+                      <a:pPr algn="ctr"/>
+                      <a:r>
+                        <a:rPr sz="1000">
+                          <a:latin typeface="Calibri"/>
+                        </a:rPr>
                         <a:t>Sweden</a:t>
                       </a:r>
                     </a:p>
@@ -5727,12 +5625,11 @@
                     <a:bodyPr/>
                     <a:lstStyle/>
                     <a:p>
-                      <a:pPr algn="ctr">
-                        <a:defRPr sz="1000">
-                          <a:latin typeface="Calibri"/>
-                        </a:defRPr>
-                      </a:pPr>
-                      <a:r>
+                      <a:pPr algn="ctr"/>
+                      <a:r>
+                        <a:rPr sz="1000">
+                          <a:latin typeface="Calibri"/>
+                        </a:rPr>
                         <a:t>636</a:t>
                       </a:r>
                     </a:p>
@@ -5744,12 +5641,11 @@
                     <a:bodyPr/>
                     <a:lstStyle/>
                     <a:p>
-                      <a:pPr algn="ctr">
-                        <a:defRPr sz="1000">
-                          <a:latin typeface="Calibri"/>
-                        </a:defRPr>
-                      </a:pPr>
-                      <a:r>
+                      <a:pPr algn="ctr"/>
+                      <a:r>
+                        <a:rPr sz="1000">
+                          <a:latin typeface="Calibri"/>
+                        </a:rPr>
                         <a:t>12.7%</a:t>
                       </a:r>
                     </a:p>
@@ -5761,12 +5657,11 @@
                     <a:bodyPr/>
                     <a:lstStyle/>
                     <a:p>
-                      <a:pPr algn="ctr">
-                        <a:defRPr sz="1000">
-                          <a:latin typeface="Calibri"/>
-                        </a:defRPr>
-                      </a:pPr>
-                      <a:r>
+                      <a:pPr algn="ctr"/>
+                      <a:r>
+                        <a:rPr sz="1000">
+                          <a:latin typeface="Calibri"/>
+                        </a:rPr>
                         <a:t>0.040</a:t>
                       </a:r>
                     </a:p>
@@ -5778,12 +5673,11 @@
                     <a:bodyPr/>
                     <a:lstStyle/>
                     <a:p>
-                      <a:pPr algn="ctr">
-                        <a:defRPr sz="1000">
-                          <a:latin typeface="Calibri"/>
-                        </a:defRPr>
-                      </a:pPr>
-                      <a:r>
+                      <a:pPr algn="ctr"/>
+                      <a:r>
+                        <a:rPr sz="1000">
+                          <a:latin typeface="Calibri"/>
+                        </a:rPr>
                         <a:t>0.096</a:t>
                       </a:r>
                     </a:p>
@@ -5795,12 +5689,11 @@
                     <a:bodyPr/>
                     <a:lstStyle/>
                     <a:p>
-                      <a:pPr algn="ctr">
-                        <a:defRPr sz="1000">
-                          <a:latin typeface="Calibri"/>
-                        </a:defRPr>
-                      </a:pPr>
-                      <a:r>
+                      <a:pPr algn="ctr"/>
+                      <a:r>
+                        <a:rPr sz="1000">
+                          <a:latin typeface="Calibri"/>
+                        </a:rPr>
                         <a:t>0.00073</a:t>
                       </a:r>
                     </a:p>
@@ -5812,12 +5705,11 @@
                     <a:bodyPr/>
                     <a:lstStyle/>
                     <a:p>
-                      <a:pPr algn="ctr">
-                        <a:defRPr sz="1000">
-                          <a:latin typeface="Calibri"/>
-                        </a:defRPr>
-                      </a:pPr>
-                      <a:r>
+                      <a:pPr algn="ctr"/>
+                      <a:r>
+                        <a:rPr sz="1000">
+                          <a:latin typeface="Calibri"/>
+                        </a:rPr>
                         <a:t>3</a:t>
                       </a:r>
                     </a:p>
@@ -5831,12 +5723,11 @@
                     <a:bodyPr/>
                     <a:lstStyle/>
                     <a:p>
-                      <a:pPr algn="ctr">
-                        <a:defRPr sz="1000">
-                          <a:latin typeface="Calibri"/>
-                        </a:defRPr>
-                      </a:pPr>
-                      <a:r>
+                      <a:pPr algn="ctr"/>
+                      <a:r>
+                        <a:rPr sz="1000">
+                          <a:latin typeface="Calibri"/>
+                        </a:rPr>
                         <a:t>Australia</a:t>
                       </a:r>
                     </a:p>
@@ -5852,12 +5743,11 @@
                     <a:bodyPr/>
                     <a:lstStyle/>
                     <a:p>
-                      <a:pPr algn="ctr">
-                        <a:defRPr sz="1000">
-                          <a:latin typeface="Calibri"/>
-                        </a:defRPr>
-                      </a:pPr>
-                      <a:r>
+                      <a:pPr algn="ctr"/>
+                      <a:r>
+                        <a:rPr sz="1000">
+                          <a:latin typeface="Calibri"/>
+                        </a:rPr>
                         <a:t>568</a:t>
                       </a:r>
                     </a:p>
@@ -5873,12 +5763,11 @@
                     <a:bodyPr/>
                     <a:lstStyle/>
                     <a:p>
-                      <a:pPr algn="ctr">
-                        <a:defRPr sz="1000">
-                          <a:latin typeface="Calibri"/>
-                        </a:defRPr>
-                      </a:pPr>
-                      <a:r>
+                      <a:pPr algn="ctr"/>
+                      <a:r>
+                        <a:rPr sz="1000">
+                          <a:latin typeface="Calibri"/>
+                        </a:rPr>
                         <a:t>15.0%</a:t>
                       </a:r>
                     </a:p>
@@ -5894,12 +5783,11 @@
                     <a:bodyPr/>
                     <a:lstStyle/>
                     <a:p>
-                      <a:pPr algn="ctr">
-                        <a:defRPr sz="1000">
-                          <a:latin typeface="Calibri"/>
-                        </a:defRPr>
-                      </a:pPr>
-                      <a:r>
+                      <a:pPr algn="ctr"/>
+                      <a:r>
+                        <a:rPr sz="1000">
+                          <a:latin typeface="Calibri"/>
+                        </a:rPr>
                         <a:t>0.040</a:t>
                       </a:r>
                     </a:p>
@@ -5915,12 +5803,11 @@
                     <a:bodyPr/>
                     <a:lstStyle/>
                     <a:p>
-                      <a:pPr algn="ctr">
-                        <a:defRPr sz="1000">
-                          <a:latin typeface="Calibri"/>
-                        </a:defRPr>
-                      </a:pPr>
-                      <a:r>
+                      <a:pPr algn="ctr"/>
+                      <a:r>
+                        <a:rPr sz="1000">
+                          <a:latin typeface="Calibri"/>
+                        </a:rPr>
                         <a:t>0.109</a:t>
                       </a:r>
                     </a:p>
@@ -5936,12 +5823,11 @@
                     <a:bodyPr/>
                     <a:lstStyle/>
                     <a:p>
-                      <a:pPr algn="ctr">
-                        <a:defRPr sz="1000">
-                          <a:latin typeface="Calibri"/>
-                        </a:defRPr>
-                      </a:pPr>
-                      <a:r>
+                      <a:pPr algn="ctr"/>
+                      <a:r>
+                        <a:rPr sz="1000">
+                          <a:latin typeface="Calibri"/>
+                        </a:rPr>
                         <a:t>0.00096</a:t>
                       </a:r>
                     </a:p>
@@ -5957,12 +5843,11 @@
                     <a:bodyPr/>
                     <a:lstStyle/>
                     <a:p>
-                      <a:pPr algn="ctr">
-                        <a:defRPr sz="1000">
-                          <a:latin typeface="Calibri"/>
-                        </a:defRPr>
-                      </a:pPr>
-                      <a:r>
+                      <a:pPr algn="ctr"/>
+                      <a:r>
+                        <a:rPr sz="1000">
+                          <a:latin typeface="Calibri"/>
+                        </a:rPr>
                         <a:t>4</a:t>
                       </a:r>
                     </a:p>
@@ -5980,12 +5865,11 @@
                     <a:bodyPr/>
                     <a:lstStyle/>
                     <a:p>
-                      <a:pPr algn="ctr">
-                        <a:defRPr sz="1000">
-                          <a:latin typeface="Calibri"/>
-                        </a:defRPr>
-                      </a:pPr>
-                      <a:r>
+                      <a:pPr algn="ctr"/>
+                      <a:r>
+                        <a:rPr sz="1000">
+                          <a:latin typeface="Calibri"/>
+                        </a:rPr>
                         <a:t>Argentina</a:t>
                       </a:r>
                     </a:p>
@@ -5997,12 +5881,11 @@
                     <a:bodyPr/>
                     <a:lstStyle/>
                     <a:p>
-                      <a:pPr algn="ctr">
-                        <a:defRPr sz="1000">
-                          <a:latin typeface="Calibri"/>
-                        </a:defRPr>
-                      </a:pPr>
-                      <a:r>
+                      <a:pPr algn="ctr"/>
+                      <a:r>
+                        <a:rPr sz="1000">
+                          <a:latin typeface="Calibri"/>
+                        </a:rPr>
                         <a:t>545</a:t>
                       </a:r>
                     </a:p>
@@ -6014,12 +5897,11 @@
                     <a:bodyPr/>
                     <a:lstStyle/>
                     <a:p>
-                      <a:pPr algn="ctr">
-                        <a:defRPr sz="1000">
-                          <a:latin typeface="Calibri"/>
-                        </a:defRPr>
-                      </a:pPr>
-                      <a:r>
+                      <a:pPr algn="ctr"/>
+                      <a:r>
+                        <a:rPr sz="1000">
+                          <a:latin typeface="Calibri"/>
+                        </a:rPr>
                         <a:t>21.8%</a:t>
                       </a:r>
                     </a:p>
@@ -6031,12 +5913,11 @@
                     <a:bodyPr/>
                     <a:lstStyle/>
                     <a:p>
-                      <a:pPr algn="ctr">
-                        <a:defRPr sz="1000">
-                          <a:latin typeface="Calibri"/>
-                        </a:defRPr>
-                      </a:pPr>
-                      <a:r>
+                      <a:pPr algn="ctr"/>
+                      <a:r>
+                        <a:rPr sz="1000">
+                          <a:latin typeface="Calibri"/>
+                        </a:rPr>
                         <a:t>0.040</a:t>
                       </a:r>
                     </a:p>
@@ -6048,12 +5929,11 @@
                     <a:bodyPr/>
                     <a:lstStyle/>
                     <a:p>
-                      <a:pPr algn="ctr">
-                        <a:defRPr sz="1000">
-                          <a:latin typeface="Calibri"/>
-                        </a:defRPr>
-                      </a:pPr>
-                      <a:r>
+                      <a:pPr algn="ctr"/>
+                      <a:r>
+                        <a:rPr sz="1000">
+                          <a:latin typeface="Calibri"/>
+                        </a:rPr>
                         <a:t>0.079</a:t>
                       </a:r>
                     </a:p>
@@ -6065,12 +5945,11 @@
                     <a:bodyPr/>
                     <a:lstStyle/>
                     <a:p>
-                      <a:pPr algn="ctr">
-                        <a:defRPr sz="1000">
-                          <a:latin typeface="Calibri"/>
-                        </a:defRPr>
-                      </a:pPr>
-                      <a:r>
+                      <a:pPr algn="ctr"/>
+                      <a:r>
+                        <a:rPr sz="1000">
+                          <a:latin typeface="Calibri"/>
+                        </a:rPr>
                         <a:t>0.00157</a:t>
                       </a:r>
                     </a:p>
@@ -6082,12 +5961,11 @@
                     <a:bodyPr/>
                     <a:lstStyle/>
                     <a:p>
-                      <a:pPr algn="ctr">
-                        <a:defRPr sz="1000">
-                          <a:latin typeface="Calibri"/>
-                        </a:defRPr>
-                      </a:pPr>
-                      <a:r>
+                      <a:pPr algn="ctr"/>
+                      <a:r>
+                        <a:rPr sz="1000">
+                          <a:latin typeface="Calibri"/>
+                        </a:rPr>
                         <a:t>3</a:t>
                       </a:r>
                     </a:p>
@@ -6121,15 +5999,13 @@
           </a:bodyPr>
           <a:lstStyle/>
           <a:p>
-            <a:pPr>
-              <a:defRPr sz="1000" i="1">
+            <a:r>
+              <a:rPr sz="1000" i="1">
                 <a:solidFill>
                   <a:srgbClr val="666666"/>
                 </a:solidFill>
                 <a:latin typeface="Calibri"/>
-              </a:defRPr>
-            </a:pPr>
-            <a:r>
+              </a:rPr>
               <a:t>r(ICR_pca_reg, mortality) = 0.90, p = 0.003</a:t>
             </a:r>
           </a:p>
@@ -6292,15 +6168,14 @@
                     <a:bodyPr/>
                     <a:lstStyle/>
                     <a:p>
-                      <a:pPr algn="ctr">
-                        <a:defRPr sz="1100" b="1">
+                      <a:pPr algn="ctr"/>
+                      <a:r>
+                        <a:rPr sz="1100" b="1">
                           <a:solidFill>
                             <a:srgbClr val="FFFFFF"/>
                           </a:solidFill>
                           <a:latin typeface="Calibri"/>
-                        </a:defRPr>
-                      </a:pPr>
-                      <a:r>
+                        </a:rPr>
                         <a:t>Excluded</a:t>
                       </a:r>
                     </a:p>
@@ -6316,15 +6191,14 @@
                     <a:bodyPr/>
                     <a:lstStyle/>
                     <a:p>
-                      <a:pPr algn="ctr">
-                        <a:defRPr sz="1100" b="1">
+                      <a:pPr algn="ctr"/>
+                      <a:r>
+                        <a:rPr sz="1100" b="1">
                           <a:solidFill>
                             <a:srgbClr val="FFFFFF"/>
                           </a:solidFill>
                           <a:latin typeface="Calibri"/>
-                        </a:defRPr>
-                      </a:pPr>
-                      <a:r>
+                        </a:rPr>
                         <a:t>r (loading)</a:t>
                       </a:r>
                     </a:p>
@@ -6340,15 +6214,14 @@
                     <a:bodyPr/>
                     <a:lstStyle/>
                     <a:p>
-                      <a:pPr algn="ctr">
-                        <a:defRPr sz="1100" b="1">
+                      <a:pPr algn="ctr"/>
+                      <a:r>
+                        <a:rPr sz="1100" b="1">
                           <a:solidFill>
                             <a:srgbClr val="FFFFFF"/>
                           </a:solidFill>
                           <a:latin typeface="Calibri"/>
-                        </a:defRPr>
-                      </a:pPr>
-                      <a:r>
+                        </a:rPr>
                         <a:t>p</a:t>
                       </a:r>
                     </a:p>
@@ -6364,15 +6237,14 @@
                     <a:bodyPr/>
                     <a:lstStyle/>
                     <a:p>
-                      <a:pPr algn="ctr">
-                        <a:defRPr sz="1100" b="1">
+                      <a:pPr algn="ctr"/>
+                      <a:r>
+                        <a:rPr sz="1100" b="1">
                           <a:solidFill>
                             <a:srgbClr val="FFFFFF"/>
                           </a:solidFill>
                           <a:latin typeface="Calibri"/>
-                        </a:defRPr>
-                      </a:pPr>
-                      <a:r>
+                        </a:rPr>
                         <a:t>r (regression)</a:t>
                       </a:r>
                     </a:p>
@@ -6388,15 +6260,14 @@
                     <a:bodyPr/>
                     <a:lstStyle/>
                     <a:p>
-                      <a:pPr algn="ctr">
-                        <a:defRPr sz="1100" b="1">
+                      <a:pPr algn="ctr"/>
+                      <a:r>
+                        <a:rPr sz="1100" b="1">
                           <a:solidFill>
                             <a:srgbClr val="FFFFFF"/>
                           </a:solidFill>
                           <a:latin typeface="Calibri"/>
-                        </a:defRPr>
-                      </a:pPr>
-                      <a:r>
+                        </a:rPr>
                         <a:t>p</a:t>
                       </a:r>
                     </a:p>
@@ -6414,12 +6285,11 @@
                     <a:bodyPr/>
                     <a:lstStyle/>
                     <a:p>
-                      <a:pPr algn="ctr">
-                        <a:defRPr sz="1000">
-                          <a:latin typeface="Calibri"/>
-                        </a:defRPr>
-                      </a:pPr>
-                      <a:r>
+                      <a:pPr algn="ctr"/>
+                      <a:r>
+                        <a:rPr sz="1000">
+                          <a:latin typeface="Calibri"/>
+                        </a:rPr>
                         <a:t>UK</a:t>
                       </a:r>
                     </a:p>
@@ -6435,12 +6305,11 @@
                     <a:bodyPr/>
                     <a:lstStyle/>
                     <a:p>
-                      <a:pPr algn="ctr">
-                        <a:defRPr sz="1000">
-                          <a:latin typeface="Calibri"/>
-                        </a:defRPr>
-                      </a:pPr>
-                      <a:r>
+                      <a:pPr algn="ctr"/>
+                      <a:r>
+                        <a:rPr sz="1000">
+                          <a:latin typeface="Calibri"/>
+                        </a:rPr>
                         <a:t>0.169</a:t>
                       </a:r>
                     </a:p>
@@ -6456,12 +6325,11 @@
                     <a:bodyPr/>
                     <a:lstStyle/>
                     <a:p>
-                      <a:pPr algn="ctr">
-                        <a:defRPr sz="1000">
-                          <a:latin typeface="Calibri"/>
-                        </a:defRPr>
-                      </a:pPr>
-                      <a:r>
+                      <a:pPr algn="ctr"/>
+                      <a:r>
+                        <a:rPr sz="1000">
+                          <a:latin typeface="Calibri"/>
+                        </a:rPr>
                         <a:t>0.717</a:t>
                       </a:r>
                     </a:p>
@@ -6477,12 +6345,11 @@
                     <a:bodyPr/>
                     <a:lstStyle/>
                     <a:p>
-                      <a:pPr algn="ctr">
-                        <a:defRPr sz="1000">
-                          <a:latin typeface="Calibri"/>
-                        </a:defRPr>
-                      </a:pPr>
-                      <a:r>
+                      <a:pPr algn="ctr"/>
+                      <a:r>
+                        <a:rPr sz="1000">
+                          <a:latin typeface="Calibri"/>
+                        </a:rPr>
                         <a:t>0.954</a:t>
                       </a:r>
                     </a:p>
@@ -6498,12 +6365,11 @@
                     <a:bodyPr/>
                     <a:lstStyle/>
                     <a:p>
-                      <a:pPr algn="ctr">
-                        <a:defRPr sz="1000">
-                          <a:latin typeface="Calibri"/>
-                        </a:defRPr>
-                      </a:pPr>
-                      <a:r>
+                      <a:pPr algn="ctr"/>
+                      <a:r>
+                        <a:rPr sz="1000">
+                          <a:latin typeface="Calibri"/>
+                        </a:rPr>
                         <a:t>0.001</a:t>
                       </a:r>
                     </a:p>
@@ -6521,12 +6387,11 @@
                     <a:bodyPr/>
                     <a:lstStyle/>
                     <a:p>
-                      <a:pPr algn="ctr">
-                        <a:defRPr sz="1000">
-                          <a:latin typeface="Calibri"/>
-                        </a:defRPr>
-                      </a:pPr>
-                      <a:r>
+                      <a:pPr algn="ctr"/>
+                      <a:r>
+                        <a:rPr sz="1000">
+                          <a:latin typeface="Calibri"/>
+                        </a:rPr>
                         <a:t>Italy</a:t>
                       </a:r>
                     </a:p>
@@ -6538,12 +6403,11 @@
                     <a:bodyPr/>
                     <a:lstStyle/>
                     <a:p>
-                      <a:pPr algn="ctr">
-                        <a:defRPr sz="1000">
-                          <a:latin typeface="Calibri"/>
-                        </a:defRPr>
-                      </a:pPr>
-                      <a:r>
+                      <a:pPr algn="ctr"/>
+                      <a:r>
+                        <a:rPr sz="1000">
+                          <a:latin typeface="Calibri"/>
+                        </a:rPr>
                         <a:t>0.286</a:t>
                       </a:r>
                     </a:p>
@@ -6555,12 +6419,11 @@
                     <a:bodyPr/>
                     <a:lstStyle/>
                     <a:p>
-                      <a:pPr algn="ctr">
-                        <a:defRPr sz="1000">
-                          <a:latin typeface="Calibri"/>
-                        </a:defRPr>
-                      </a:pPr>
-                      <a:r>
+                      <a:pPr algn="ctr"/>
+                      <a:r>
+                        <a:rPr sz="1000">
+                          <a:latin typeface="Calibri"/>
+                        </a:rPr>
                         <a:t>0.534</a:t>
                       </a:r>
                     </a:p>
@@ -6572,12 +6435,11 @@
                     <a:bodyPr/>
                     <a:lstStyle/>
                     <a:p>
-                      <a:pPr algn="ctr">
-                        <a:defRPr sz="1000">
-                          <a:latin typeface="Calibri"/>
-                        </a:defRPr>
-                      </a:pPr>
-                      <a:r>
+                      <a:pPr algn="ctr"/>
+                      <a:r>
+                        <a:rPr sz="1000">
+                          <a:latin typeface="Calibri"/>
+                        </a:rPr>
                         <a:t>0.908</a:t>
                       </a:r>
                     </a:p>
@@ -6589,12 +6451,11 @@
                     <a:bodyPr/>
                     <a:lstStyle/>
                     <a:p>
-                      <a:pPr algn="ctr">
-                        <a:defRPr sz="1000">
-                          <a:latin typeface="Calibri"/>
-                        </a:defRPr>
-                      </a:pPr>
-                      <a:r>
+                      <a:pPr algn="ctr"/>
+                      <a:r>
+                        <a:rPr sz="1000">
+                          <a:latin typeface="Calibri"/>
+                        </a:rPr>
                         <a:t>0.005</a:t>
                       </a:r>
                     </a:p>
@@ -6608,12 +6469,11 @@
                     <a:bodyPr/>
                     <a:lstStyle/>
                     <a:p>
-                      <a:pPr algn="ctr">
-                        <a:defRPr sz="1000">
-                          <a:latin typeface="Calibri"/>
-                        </a:defRPr>
-                      </a:pPr>
-                      <a:r>
+                      <a:pPr algn="ctr"/>
+                      <a:r>
+                        <a:rPr sz="1000">
+                          <a:latin typeface="Calibri"/>
+                        </a:rPr>
                         <a:t>Switzerland</a:t>
                       </a:r>
                     </a:p>
@@ -6629,12 +6489,11 @@
                     <a:bodyPr/>
                     <a:lstStyle/>
                     <a:p>
-                      <a:pPr algn="ctr">
-                        <a:defRPr sz="1000">
-                          <a:latin typeface="Calibri"/>
-                        </a:defRPr>
-                      </a:pPr>
-                      <a:r>
+                      <a:pPr algn="ctr"/>
+                      <a:r>
+                        <a:rPr sz="1000">
+                          <a:latin typeface="Calibri"/>
+                        </a:rPr>
                         <a:t>0.258</a:t>
                       </a:r>
                     </a:p>
@@ -6650,12 +6509,11 @@
                     <a:bodyPr/>
                     <a:lstStyle/>
                     <a:p>
-                      <a:pPr algn="ctr">
-                        <a:defRPr sz="1000">
-                          <a:latin typeface="Calibri"/>
-                        </a:defRPr>
-                      </a:pPr>
-                      <a:r>
+                      <a:pPr algn="ctr"/>
+                      <a:r>
+                        <a:rPr sz="1000">
+                          <a:latin typeface="Calibri"/>
+                        </a:rPr>
                         <a:t>0.577</a:t>
                       </a:r>
                     </a:p>
@@ -6671,12 +6529,11 @@
                     <a:bodyPr/>
                     <a:lstStyle/>
                     <a:p>
-                      <a:pPr algn="ctr">
-                        <a:defRPr sz="1000">
-                          <a:latin typeface="Calibri"/>
-                        </a:defRPr>
-                      </a:pPr>
-                      <a:r>
+                      <a:pPr algn="ctr"/>
+                      <a:r>
+                        <a:rPr sz="1000">
+                          <a:latin typeface="Calibri"/>
+                        </a:rPr>
                         <a:t>0.914</a:t>
                       </a:r>
                     </a:p>
@@ -6692,12 +6549,11 @@
                     <a:bodyPr/>
                     <a:lstStyle/>
                     <a:p>
-                      <a:pPr algn="ctr">
-                        <a:defRPr sz="1000">
-                          <a:latin typeface="Calibri"/>
-                        </a:defRPr>
-                      </a:pPr>
-                      <a:r>
+                      <a:pPr algn="ctr"/>
+                      <a:r>
+                        <a:rPr sz="1000">
+                          <a:latin typeface="Calibri"/>
+                        </a:rPr>
                         <a:t>0.004</a:t>
                       </a:r>
                     </a:p>
@@ -6715,12 +6571,11 @@
                     <a:bodyPr/>
                     <a:lstStyle/>
                     <a:p>
-                      <a:pPr algn="ctr">
-                        <a:defRPr sz="1000">
-                          <a:latin typeface="Calibri"/>
-                        </a:defRPr>
-                      </a:pPr>
-                      <a:r>
+                      <a:pPr algn="ctr"/>
+                      <a:r>
+                        <a:rPr sz="1000">
+                          <a:latin typeface="Calibri"/>
+                        </a:rPr>
                         <a:t>Poland</a:t>
                       </a:r>
                     </a:p>
@@ -6732,12 +6587,11 @@
                     <a:bodyPr/>
                     <a:lstStyle/>
                     <a:p>
-                      <a:pPr algn="ctr">
-                        <a:defRPr sz="1000">
-                          <a:latin typeface="Calibri"/>
-                        </a:defRPr>
-                      </a:pPr>
-                      <a:r>
+                      <a:pPr algn="ctr"/>
+                      <a:r>
+                        <a:rPr sz="1000">
+                          <a:latin typeface="Calibri"/>
+                        </a:rPr>
                         <a:t>0.154</a:t>
                       </a:r>
                     </a:p>
@@ -6749,12 +6603,11 @@
                     <a:bodyPr/>
                     <a:lstStyle/>
                     <a:p>
-                      <a:pPr algn="ctr">
-                        <a:defRPr sz="1000">
-                          <a:latin typeface="Calibri"/>
-                        </a:defRPr>
-                      </a:pPr>
-                      <a:r>
+                      <a:pPr algn="ctr"/>
+                      <a:r>
+                        <a:rPr sz="1000">
+                          <a:latin typeface="Calibri"/>
+                        </a:rPr>
                         <a:t>0.742</a:t>
                       </a:r>
                     </a:p>
@@ -6766,12 +6619,11 @@
                     <a:bodyPr/>
                     <a:lstStyle/>
                     <a:p>
-                      <a:pPr algn="ctr">
-                        <a:defRPr sz="1000">
-                          <a:latin typeface="Calibri"/>
-                        </a:defRPr>
-                      </a:pPr>
-                      <a:r>
+                      <a:pPr algn="ctr"/>
+                      <a:r>
+                        <a:rPr sz="1000">
+                          <a:latin typeface="Calibri"/>
+                        </a:rPr>
                         <a:t>0.860</a:t>
                       </a:r>
                     </a:p>
@@ -6783,12 +6635,11 @@
                     <a:bodyPr/>
                     <a:lstStyle/>
                     <a:p>
-                      <a:pPr algn="ctr">
-                        <a:defRPr sz="1000">
-                          <a:latin typeface="Calibri"/>
-                        </a:defRPr>
-                      </a:pPr>
-                      <a:r>
+                      <a:pPr algn="ctr"/>
+                      <a:r>
+                        <a:rPr sz="1000">
+                          <a:latin typeface="Calibri"/>
+                        </a:rPr>
                         <a:t>0.013</a:t>
                       </a:r>
                     </a:p>
@@ -6802,12 +6653,11 @@
                     <a:bodyPr/>
                     <a:lstStyle/>
                     <a:p>
-                      <a:pPr algn="ctr">
-                        <a:defRPr sz="1000">
-                          <a:latin typeface="Calibri"/>
-                        </a:defRPr>
-                      </a:pPr>
-                      <a:r>
+                      <a:pPr algn="ctr"/>
+                      <a:r>
+                        <a:rPr sz="1000">
+                          <a:latin typeface="Calibri"/>
+                        </a:rPr>
                         <a:t>Netherlands</a:t>
                       </a:r>
                     </a:p>
@@ -6823,12 +6673,11 @@
                     <a:bodyPr/>
                     <a:lstStyle/>
                     <a:p>
-                      <a:pPr algn="ctr">
-                        <a:defRPr sz="1000">
-                          <a:latin typeface="Calibri"/>
-                        </a:defRPr>
-                      </a:pPr>
-                      <a:r>
+                      <a:pPr algn="ctr"/>
+                      <a:r>
+                        <a:rPr sz="1000">
+                          <a:latin typeface="Calibri"/>
+                        </a:rPr>
                         <a:t>0.526</a:t>
                       </a:r>
                     </a:p>
@@ -6844,12 +6693,11 @@
                     <a:bodyPr/>
                     <a:lstStyle/>
                     <a:p>
-                      <a:pPr algn="ctr">
-                        <a:defRPr sz="1000">
-                          <a:latin typeface="Calibri"/>
-                        </a:defRPr>
-                      </a:pPr>
-                      <a:r>
+                      <a:pPr algn="ctr"/>
+                      <a:r>
+                        <a:rPr sz="1000">
+                          <a:latin typeface="Calibri"/>
+                        </a:rPr>
                         <a:t>0.225</a:t>
                       </a:r>
                     </a:p>
@@ -6865,12 +6713,11 @@
                     <a:bodyPr/>
                     <a:lstStyle/>
                     <a:p>
-                      <a:pPr algn="ctr">
-                        <a:defRPr sz="1000">
-                          <a:latin typeface="Calibri"/>
-                        </a:defRPr>
-                      </a:pPr>
-                      <a:r>
+                      <a:pPr algn="ctr"/>
+                      <a:r>
+                        <a:rPr sz="1000">
+                          <a:latin typeface="Calibri"/>
+                        </a:rPr>
                         <a:t>0.903</a:t>
                       </a:r>
                     </a:p>
@@ -6886,12 +6733,11 @@
                     <a:bodyPr/>
                     <a:lstStyle/>
                     <a:p>
-                      <a:pPr algn="ctr">
-                        <a:defRPr sz="1000">
-                          <a:latin typeface="Calibri"/>
-                        </a:defRPr>
-                      </a:pPr>
-                      <a:r>
+                      <a:pPr algn="ctr"/>
+                      <a:r>
+                        <a:rPr sz="1000">
+                          <a:latin typeface="Calibri"/>
+                        </a:rPr>
                         <a:t>0.005</a:t>
                       </a:r>
                     </a:p>
@@ -6909,12 +6755,11 @@
                     <a:bodyPr/>
                     <a:lstStyle/>
                     <a:p>
-                      <a:pPr algn="ctr">
-                        <a:defRPr sz="1000">
-                          <a:latin typeface="Calibri"/>
-                        </a:defRPr>
-                      </a:pPr>
-                      <a:r>
+                      <a:pPr algn="ctr"/>
+                      <a:r>
+                        <a:rPr sz="1000">
+                          <a:latin typeface="Calibri"/>
+                        </a:rPr>
                         <a:t>Sweden</a:t>
                       </a:r>
                     </a:p>
@@ -6926,12 +6771,11 @@
                     <a:bodyPr/>
                     <a:lstStyle/>
                     <a:p>
-                      <a:pPr algn="ctr">
-                        <a:defRPr sz="1000">
-                          <a:latin typeface="Calibri"/>
-                        </a:defRPr>
-                      </a:pPr>
-                      <a:r>
+                      <a:pPr algn="ctr"/>
+                      <a:r>
+                        <a:rPr sz="1000">
+                          <a:latin typeface="Calibri"/>
+                        </a:rPr>
                         <a:t>0.205</a:t>
                       </a:r>
                     </a:p>
@@ -6943,12 +6787,11 @@
                     <a:bodyPr/>
                     <a:lstStyle/>
                     <a:p>
-                      <a:pPr algn="ctr">
-                        <a:defRPr sz="1000">
-                          <a:latin typeface="Calibri"/>
-                        </a:defRPr>
-                      </a:pPr>
-                      <a:r>
+                      <a:pPr algn="ctr"/>
+                      <a:r>
+                        <a:rPr sz="1000">
+                          <a:latin typeface="Calibri"/>
+                        </a:rPr>
                         <a:t>0.659</a:t>
                       </a:r>
                     </a:p>
@@ -6960,12 +6803,11 @@
                     <a:bodyPr/>
                     <a:lstStyle/>
                     <a:p>
-                      <a:pPr algn="ctr">
-                        <a:defRPr sz="1000">
-                          <a:latin typeface="Calibri"/>
-                        </a:defRPr>
-                      </a:pPr>
-                      <a:r>
+                      <a:pPr algn="ctr"/>
+                      <a:r>
+                        <a:rPr sz="1000">
+                          <a:latin typeface="Calibri"/>
+                        </a:rPr>
                         <a:t>0.843</a:t>
                       </a:r>
                     </a:p>
@@ -6977,12 +6819,11 @@
                     <a:bodyPr/>
                     <a:lstStyle/>
                     <a:p>
-                      <a:pPr algn="ctr">
-                        <a:defRPr sz="1000">
-                          <a:latin typeface="Calibri"/>
-                        </a:defRPr>
-                      </a:pPr>
-                      <a:r>
+                      <a:pPr algn="ctr"/>
+                      <a:r>
+                        <a:rPr sz="1000">
+                          <a:latin typeface="Calibri"/>
+                        </a:rPr>
                         <a:t>0.017</a:t>
                       </a:r>
                     </a:p>
@@ -6996,12 +6837,11 @@
                     <a:bodyPr/>
                     <a:lstStyle/>
                     <a:p>
-                      <a:pPr algn="ctr">
-                        <a:defRPr sz="1000">
-                          <a:latin typeface="Calibri"/>
-                        </a:defRPr>
-                      </a:pPr>
-                      <a:r>
+                      <a:pPr algn="ctr"/>
+                      <a:r>
+                        <a:rPr sz="1000">
+                          <a:latin typeface="Calibri"/>
+                        </a:rPr>
                         <a:t>Australia</a:t>
                       </a:r>
                     </a:p>
@@ -7017,12 +6857,11 @@
                     <a:bodyPr/>
                     <a:lstStyle/>
                     <a:p>
-                      <a:pPr algn="ctr">
-                        <a:defRPr sz="1000">
-                          <a:latin typeface="Calibri"/>
-                        </a:defRPr>
-                      </a:pPr>
-                      <a:r>
+                      <a:pPr algn="ctr"/>
+                      <a:r>
+                        <a:rPr sz="1000">
+                          <a:latin typeface="Calibri"/>
+                        </a:rPr>
                         <a:t>0.272</a:t>
                       </a:r>
                     </a:p>
@@ -7038,12 +6877,11 @@
                     <a:bodyPr/>
                     <a:lstStyle/>
                     <a:p>
-                      <a:pPr algn="ctr">
-                        <a:defRPr sz="1000">
-                          <a:latin typeface="Calibri"/>
-                        </a:defRPr>
-                      </a:pPr>
-                      <a:r>
+                      <a:pPr algn="ctr"/>
+                      <a:r>
+                        <a:rPr sz="1000">
+                          <a:latin typeface="Calibri"/>
+                        </a:rPr>
                         <a:t>0.555</a:t>
                       </a:r>
                     </a:p>
@@ -7059,12 +6897,11 @@
                     <a:bodyPr/>
                     <a:lstStyle/>
                     <a:p>
-                      <a:pPr algn="ctr">
-                        <a:defRPr sz="1000">
-                          <a:latin typeface="Calibri"/>
-                        </a:defRPr>
-                      </a:pPr>
-                      <a:r>
+                      <a:pPr algn="ctr"/>
+                      <a:r>
+                        <a:rPr sz="1000">
+                          <a:latin typeface="Calibri"/>
+                        </a:rPr>
                         <a:t>0.875</a:t>
                       </a:r>
                     </a:p>
@@ -7080,12 +6917,11 @@
                     <a:bodyPr/>
                     <a:lstStyle/>
                     <a:p>
-                      <a:pPr algn="ctr">
-                        <a:defRPr sz="1000">
-                          <a:latin typeface="Calibri"/>
-                        </a:defRPr>
-                      </a:pPr>
-                      <a:r>
+                      <a:pPr algn="ctr"/>
+                      <a:r>
+                        <a:rPr sz="1000">
+                          <a:latin typeface="Calibri"/>
+                        </a:rPr>
                         <a:t>0.010</a:t>
                       </a:r>
                     </a:p>
@@ -7103,12 +6939,11 @@
                     <a:bodyPr/>
                     <a:lstStyle/>
                     <a:p>
-                      <a:pPr algn="ctr">
-                        <a:defRPr sz="1000">
-                          <a:latin typeface="Calibri"/>
-                        </a:defRPr>
-                      </a:pPr>
-                      <a:r>
+                      <a:pPr algn="ctr"/>
+                      <a:r>
+                        <a:rPr sz="1000">
+                          <a:latin typeface="Calibri"/>
+                        </a:rPr>
                         <a:t>Argentina</a:t>
                       </a:r>
                     </a:p>
@@ -7120,12 +6955,11 @@
                     <a:bodyPr/>
                     <a:lstStyle/>
                     <a:p>
-                      <a:pPr algn="ctr">
-                        <a:defRPr sz="1000">
-                          <a:latin typeface="Calibri"/>
-                        </a:defRPr>
-                      </a:pPr>
-                      <a:r>
+                      <a:pPr algn="ctr"/>
+                      <a:r>
+                        <a:rPr sz="1000">
+                          <a:latin typeface="Calibri"/>
+                        </a:rPr>
                         <a:t>0.299</a:t>
                       </a:r>
                     </a:p>
@@ -7137,12 +6971,11 @@
                     <a:bodyPr/>
                     <a:lstStyle/>
                     <a:p>
-                      <a:pPr algn="ctr">
-                        <a:defRPr sz="1000">
-                          <a:latin typeface="Calibri"/>
-                        </a:defRPr>
-                      </a:pPr>
-                      <a:r>
+                      <a:pPr algn="ctr"/>
+                      <a:r>
+                        <a:rPr sz="1000">
+                          <a:latin typeface="Calibri"/>
+                        </a:rPr>
                         <a:t>0.515</a:t>
                       </a:r>
                     </a:p>
@@ -7154,12 +6987,11 @@
                     <a:bodyPr/>
                     <a:lstStyle/>
                     <a:p>
-                      <a:pPr algn="ctr">
-                        <a:defRPr sz="1000">
-                          <a:latin typeface="Calibri"/>
-                        </a:defRPr>
-                      </a:pPr>
-                      <a:r>
+                      <a:pPr algn="ctr"/>
+                      <a:r>
+                        <a:rPr sz="1000">
+                          <a:latin typeface="Calibri"/>
+                        </a:rPr>
                         <a:t>0.898</a:t>
                       </a:r>
                     </a:p>
@@ -7171,12 +7003,11 @@
                     <a:bodyPr/>
                     <a:lstStyle/>
                     <a:p>
-                      <a:pPr algn="ctr">
-                        <a:defRPr sz="1000">
-                          <a:latin typeface="Calibri"/>
-                        </a:defRPr>
-                      </a:pPr>
-                      <a:r>
+                      <a:pPr algn="ctr"/>
+                      <a:r>
+                        <a:rPr sz="1000">
+                          <a:latin typeface="Calibri"/>
+                        </a:rPr>
                         <a:t>0.006</a:t>
                       </a:r>
                     </a:p>
@@ -7190,12 +7021,11 @@
                     <a:bodyPr/>
                     <a:lstStyle/>
                     <a:p>
-                      <a:pPr algn="ctr">
-                        <a:defRPr sz="1000">
-                          <a:latin typeface="Calibri"/>
-                        </a:defRPr>
-                      </a:pPr>
-                      <a:r>
+                      <a:pPr algn="ctr"/>
+                      <a:r>
+                        <a:rPr sz="1000">
+                          <a:latin typeface="Calibri"/>
+                        </a:rPr>
                         <a:t>Full (n=8)</a:t>
                       </a:r>
                     </a:p>
@@ -7211,12 +7041,11 @@
                     <a:bodyPr/>
                     <a:lstStyle/>
                     <a:p>
-                      <a:pPr algn="ctr">
-                        <a:defRPr sz="1000">
-                          <a:latin typeface="Calibri"/>
-                        </a:defRPr>
-                      </a:pPr>
-                      <a:r>
+                      <a:pPr algn="ctr"/>
+                      <a:r>
+                        <a:rPr sz="1000">
+                          <a:latin typeface="Calibri"/>
+                        </a:rPr>
                         <a:t>0.265</a:t>
                       </a:r>
                     </a:p>
@@ -7232,12 +7061,11 @@
                     <a:bodyPr/>
                     <a:lstStyle/>
                     <a:p>
-                      <a:pPr algn="ctr">
-                        <a:defRPr sz="1000">
-                          <a:latin typeface="Calibri"/>
-                        </a:defRPr>
-                      </a:pPr>
-                      <a:r>
+                      <a:pPr algn="ctr"/>
+                      <a:r>
+                        <a:rPr sz="1000">
+                          <a:latin typeface="Calibri"/>
+                        </a:rPr>
                         <a:t>0.526</a:t>
                       </a:r>
                     </a:p>
@@ -7253,12 +7081,11 @@
                     <a:bodyPr/>
                     <a:lstStyle/>
                     <a:p>
-                      <a:pPr algn="ctr">
-                        <a:defRPr sz="1000">
-                          <a:latin typeface="Calibri"/>
-                        </a:defRPr>
-                      </a:pPr>
-                      <a:r>
+                      <a:pPr algn="ctr"/>
+                      <a:r>
+                        <a:rPr sz="1000">
+                          <a:latin typeface="Calibri"/>
+                        </a:rPr>
                         <a:t>0.896</a:t>
                       </a:r>
                     </a:p>
@@ -7274,12 +7101,11 @@
                     <a:bodyPr/>
                     <a:lstStyle/>
                     <a:p>
-                      <a:pPr algn="ctr">
-                        <a:defRPr sz="1000">
-                          <a:latin typeface="Calibri"/>
-                        </a:defRPr>
-                      </a:pPr>
-                      <a:r>
+                      <a:pPr algn="ctr"/>
+                      <a:r>
+                        <a:rPr sz="1000">
+                          <a:latin typeface="Calibri"/>
+                        </a:rPr>
                         <a:t>0.003</a:t>
                       </a:r>
                     </a:p>
@@ -7317,15 +7143,13 @@
           </a:bodyPr>
           <a:lstStyle/>
           <a:p>
-            <a:pPr>
-              <a:defRPr sz="1000" i="1">
+            <a:r>
+              <a:rPr sz="1000" i="1">
                 <a:solidFill>
                   <a:srgbClr val="666666"/>
                 </a:solidFill>
                 <a:latin typeface="Calibri"/>
-              </a:defRPr>
-            </a:pPr>
-            <a:r>
+              </a:rPr>
               <a:t>Regression-based ICR_pca robust: r = 0.84–0.95, all p &lt; 0.02</a:t>
             </a:r>
           </a:p>
@@ -7645,15 +7469,14 @@
           <a:bodyPr rtlCol="0" anchor="ctr" wrap="square"/>
           <a:lstStyle/>
           <a:p>
-            <a:pPr algn="ctr">
-              <a:defRPr sz="1600" b="1">
+            <a:pPr algn="ctr"/>
+            <a:r>
+              <a:rPr sz="1600" b="1">
                 <a:solidFill>
                   <a:srgbClr val="FFFFFF"/>
                 </a:solidFill>
                 <a:latin typeface="Calibri"/>
-              </a:defRPr>
-            </a:pPr>
-            <a:r>
+              </a:rPr>
               <a:t>Study A (D = 10)</a:t>
             </a:r>
           </a:p>
@@ -7700,15 +7523,14 @@
           <a:bodyPr rtlCol="0" anchor="ctr" wrap="square"/>
           <a:lstStyle/>
           <a:p>
-            <a:pPr algn="ctr">
-              <a:defRPr sz="900" b="1">
+            <a:pPr algn="ctr"/>
+            <a:r>
+              <a:rPr sz="900" b="1">
                 <a:solidFill>
                   <a:srgbClr val="FFFFFF"/>
                 </a:solidFill>
                 <a:latin typeface="Calibri"/>
-              </a:defRPr>
-            </a:pPr>
-            <a:r>
+              </a:rPr>
               <a:t>EP</a:t>
             </a:r>
           </a:p>
@@ -7755,12 +7577,14 @@
           <a:bodyPr rtlCol="0" anchor="ctr" wrap="square"/>
           <a:lstStyle/>
           <a:p>
-            <a:pPr algn="ctr">
-              <a:defRPr sz="900" b="0">
+            <a:pPr algn="ctr"/>
+            <a:r>
+              <a:rPr sz="900" b="0">
+                <a:solidFill>
+                  <a:srgbClr val="333333"/>
+                </a:solidFill>
                 <a:latin typeface="Calibri"/>
-              </a:defRPr>
-            </a:pPr>
-            <a:r>
+              </a:rPr>
               <a:t>V1</a:t>
             </a:r>
           </a:p>
@@ -7807,12 +7631,14 @@
           <a:bodyPr rtlCol="0" anchor="ctr" wrap="square"/>
           <a:lstStyle/>
           <a:p>
-            <a:pPr algn="ctr">
-              <a:defRPr sz="900" b="0">
+            <a:pPr algn="ctr"/>
+            <a:r>
+              <a:rPr sz="900" b="0">
+                <a:solidFill>
+                  <a:srgbClr val="333333"/>
+                </a:solidFill>
                 <a:latin typeface="Calibri"/>
-              </a:defRPr>
-            </a:pPr>
-            <a:r>
+              </a:rPr>
               <a:t>V2</a:t>
             </a:r>
           </a:p>
@@ -7859,12 +7685,14 @@
           <a:bodyPr rtlCol="0" anchor="ctr" wrap="square"/>
           <a:lstStyle/>
           <a:p>
-            <a:pPr algn="ctr">
-              <a:defRPr sz="900" b="0">
+            <a:pPr algn="ctr"/>
+            <a:r>
+              <a:rPr sz="900" b="0">
+                <a:solidFill>
+                  <a:srgbClr val="333333"/>
+                </a:solidFill>
                 <a:latin typeface="Calibri"/>
-              </a:defRPr>
-            </a:pPr>
-            <a:r>
+              </a:rPr>
               <a:t>V3</a:t>
             </a:r>
           </a:p>
@@ -7911,12 +7739,14 @@
           <a:bodyPr rtlCol="0" anchor="ctr" wrap="square"/>
           <a:lstStyle/>
           <a:p>
-            <a:pPr algn="ctr">
-              <a:defRPr sz="900" b="0">
+            <a:pPr algn="ctr"/>
+            <a:r>
+              <a:rPr sz="900" b="0">
+                <a:solidFill>
+                  <a:srgbClr val="333333"/>
+                </a:solidFill>
                 <a:latin typeface="Calibri"/>
-              </a:defRPr>
-            </a:pPr>
-            <a:r>
+              </a:rPr>
               <a:t>V4</a:t>
             </a:r>
           </a:p>
@@ -7963,12 +7793,14 @@
           <a:bodyPr rtlCol="0" anchor="ctr" wrap="square"/>
           <a:lstStyle/>
           <a:p>
-            <a:pPr algn="ctr">
-              <a:defRPr sz="900" b="0">
+            <a:pPr algn="ctr"/>
+            <a:r>
+              <a:rPr sz="900" b="0">
+                <a:solidFill>
+                  <a:srgbClr val="333333"/>
+                </a:solidFill>
                 <a:latin typeface="Calibri"/>
-              </a:defRPr>
-            </a:pPr>
-            <a:r>
+              </a:rPr>
               <a:t>V5</a:t>
             </a:r>
           </a:p>
@@ -8015,12 +7847,14 @@
           <a:bodyPr rtlCol="0" anchor="ctr" wrap="square"/>
           <a:lstStyle/>
           <a:p>
-            <a:pPr algn="ctr">
-              <a:defRPr sz="900" b="0">
+            <a:pPr algn="ctr"/>
+            <a:r>
+              <a:rPr sz="900" b="0">
+                <a:solidFill>
+                  <a:srgbClr val="333333"/>
+                </a:solidFill>
                 <a:latin typeface="Calibri"/>
-              </a:defRPr>
-            </a:pPr>
-            <a:r>
+              </a:rPr>
               <a:t>V6</a:t>
             </a:r>
           </a:p>
@@ -8067,12 +7901,14 @@
           <a:bodyPr rtlCol="0" anchor="ctr" wrap="square"/>
           <a:lstStyle/>
           <a:p>
-            <a:pPr algn="ctr">
-              <a:defRPr sz="900" b="0">
+            <a:pPr algn="ctr"/>
+            <a:r>
+              <a:rPr sz="900" b="0">
+                <a:solidFill>
+                  <a:srgbClr val="333333"/>
+                </a:solidFill>
                 <a:latin typeface="Calibri"/>
-              </a:defRPr>
-            </a:pPr>
-            <a:r>
+              </a:rPr>
               <a:t>V7</a:t>
             </a:r>
           </a:p>
@@ -8119,12 +7955,14 @@
           <a:bodyPr rtlCol="0" anchor="ctr" wrap="square"/>
           <a:lstStyle/>
           <a:p>
-            <a:pPr algn="ctr">
-              <a:defRPr sz="900" b="0">
+            <a:pPr algn="ctr"/>
+            <a:r>
+              <a:rPr sz="900" b="0">
+                <a:solidFill>
+                  <a:srgbClr val="333333"/>
+                </a:solidFill>
                 <a:latin typeface="Calibri"/>
-              </a:defRPr>
-            </a:pPr>
-            <a:r>
+              </a:rPr>
               <a:t>V8</a:t>
             </a:r>
           </a:p>
@@ -8171,12 +8009,14 @@
           <a:bodyPr rtlCol="0" anchor="ctr" wrap="square"/>
           <a:lstStyle/>
           <a:p>
-            <a:pPr algn="ctr">
-              <a:defRPr sz="900" b="0">
+            <a:pPr algn="ctr"/>
+            <a:r>
+              <a:rPr sz="900" b="0">
+                <a:solidFill>
+                  <a:srgbClr val="333333"/>
+                </a:solidFill>
                 <a:latin typeface="Calibri"/>
-              </a:defRPr>
-            </a:pPr>
-            <a:r>
+              </a:rPr>
               <a:t>V9</a:t>
             </a:r>
           </a:p>
@@ -8223,12 +8063,14 @@
           <a:bodyPr rtlCol="0" anchor="ctr" wrap="square"/>
           <a:lstStyle/>
           <a:p>
-            <a:pPr algn="ctr">
-              <a:defRPr sz="1400" b="1">
+            <a:pPr algn="ctr"/>
+            <a:r>
+              <a:rPr sz="1400" b="1">
+                <a:solidFill>
+                  <a:srgbClr val="333333"/>
+                </a:solidFill>
                 <a:latin typeface="Calibri"/>
-              </a:defRPr>
-            </a:pPr>
-            <a:r>
+              </a:rPr>
               <a:t>ICR = 1/10 = 0.10 (10%)</a:t>
             </a:r>
           </a:p>
@@ -8275,15 +8117,14 @@
           <a:bodyPr rtlCol="0" anchor="ctr" wrap="square"/>
           <a:lstStyle/>
           <a:p>
-            <a:pPr algn="ctr">
-              <a:defRPr sz="1600" b="1">
+            <a:pPr algn="ctr"/>
+            <a:r>
+              <a:rPr sz="1600" b="1">
                 <a:solidFill>
                   <a:srgbClr val="FFFFFF"/>
                 </a:solidFill>
                 <a:latin typeface="Calibri"/>
-              </a:defRPr>
-            </a:pPr>
-            <a:r>
+              </a:rPr>
               <a:t>Study B (D = 50)</a:t>
             </a:r>
           </a:p>
@@ -8330,15 +8171,14 @@
           <a:bodyPr rtlCol="0" anchor="ctr" wrap="square"/>
           <a:lstStyle/>
           <a:p>
-            <a:pPr algn="ctr">
-              <a:defRPr sz="700" b="1">
+            <a:pPr algn="ctr"/>
+            <a:r>
+              <a:rPr sz="700" b="1">
                 <a:solidFill>
                   <a:srgbClr val="FFFFFF"/>
                 </a:solidFill>
                 <a:latin typeface="Calibri"/>
-              </a:defRPr>
-            </a:pPr>
-            <a:r>
+              </a:rPr>
               <a:t>EP</a:t>
             </a:r>
           </a:p>
@@ -8385,11 +8225,16 @@
           <a:bodyPr rtlCol="0" anchor="ctr" wrap="square"/>
           <a:lstStyle/>
           <a:p>
-            <a:pPr algn="ctr">
-              <a:defRPr sz="700" b="0">
+            <a:pPr algn="ctr"/>
+            <a:r>
+              <a:rPr sz="700" b="0">
+                <a:solidFill>
+                  <a:srgbClr val="333333"/>
+                </a:solidFill>
                 <a:latin typeface="Calibri"/>
-              </a:defRPr>
-            </a:pPr>
+              </a:rPr>
+              <a:t/>
+            </a:r>
           </a:p>
         </p:txBody>
       </p:sp>
@@ -8434,11 +8279,16 @@
           <a:bodyPr rtlCol="0" anchor="ctr" wrap="square"/>
           <a:lstStyle/>
           <a:p>
-            <a:pPr algn="ctr">
-              <a:defRPr sz="700" b="0">
+            <a:pPr algn="ctr"/>
+            <a:r>
+              <a:rPr sz="700" b="0">
+                <a:solidFill>
+                  <a:srgbClr val="333333"/>
+                </a:solidFill>
                 <a:latin typeface="Calibri"/>
-              </a:defRPr>
-            </a:pPr>
+              </a:rPr>
+              <a:t/>
+            </a:r>
           </a:p>
         </p:txBody>
       </p:sp>
@@ -8483,11 +8333,16 @@
           <a:bodyPr rtlCol="0" anchor="ctr" wrap="square"/>
           <a:lstStyle/>
           <a:p>
-            <a:pPr algn="ctr">
-              <a:defRPr sz="700" b="0">
+            <a:pPr algn="ctr"/>
+            <a:r>
+              <a:rPr sz="700" b="0">
+                <a:solidFill>
+                  <a:srgbClr val="333333"/>
+                </a:solidFill>
                 <a:latin typeface="Calibri"/>
-              </a:defRPr>
-            </a:pPr>
+              </a:rPr>
+              <a:t/>
+            </a:r>
           </a:p>
         </p:txBody>
       </p:sp>
@@ -8532,11 +8387,16 @@
           <a:bodyPr rtlCol="0" anchor="ctr" wrap="square"/>
           <a:lstStyle/>
           <a:p>
-            <a:pPr algn="ctr">
-              <a:defRPr sz="700" b="0">
+            <a:pPr algn="ctr"/>
+            <a:r>
+              <a:rPr sz="700" b="0">
+                <a:solidFill>
+                  <a:srgbClr val="333333"/>
+                </a:solidFill>
                 <a:latin typeface="Calibri"/>
-              </a:defRPr>
-            </a:pPr>
+              </a:rPr>
+              <a:t/>
+            </a:r>
           </a:p>
         </p:txBody>
       </p:sp>
@@ -8581,11 +8441,16 @@
           <a:bodyPr rtlCol="0" anchor="ctr" wrap="square"/>
           <a:lstStyle/>
           <a:p>
-            <a:pPr algn="ctr">
-              <a:defRPr sz="700" b="0">
+            <a:pPr algn="ctr"/>
+            <a:r>
+              <a:rPr sz="700" b="0">
+                <a:solidFill>
+                  <a:srgbClr val="333333"/>
+                </a:solidFill>
                 <a:latin typeface="Calibri"/>
-              </a:defRPr>
-            </a:pPr>
+              </a:rPr>
+              <a:t/>
+            </a:r>
           </a:p>
         </p:txBody>
       </p:sp>
@@ -8630,11 +8495,16 @@
           <a:bodyPr rtlCol="0" anchor="ctr" wrap="square"/>
           <a:lstStyle/>
           <a:p>
-            <a:pPr algn="ctr">
-              <a:defRPr sz="700" b="0">
+            <a:pPr algn="ctr"/>
+            <a:r>
+              <a:rPr sz="700" b="0">
+                <a:solidFill>
+                  <a:srgbClr val="333333"/>
+                </a:solidFill>
                 <a:latin typeface="Calibri"/>
-              </a:defRPr>
-            </a:pPr>
+              </a:rPr>
+              <a:t/>
+            </a:r>
           </a:p>
         </p:txBody>
       </p:sp>
@@ -8679,11 +8549,16 @@
           <a:bodyPr rtlCol="0" anchor="ctr" wrap="square"/>
           <a:lstStyle/>
           <a:p>
-            <a:pPr algn="ctr">
-              <a:defRPr sz="700" b="0">
+            <a:pPr algn="ctr"/>
+            <a:r>
+              <a:rPr sz="700" b="0">
+                <a:solidFill>
+                  <a:srgbClr val="333333"/>
+                </a:solidFill>
                 <a:latin typeface="Calibri"/>
-              </a:defRPr>
-            </a:pPr>
+              </a:rPr>
+              <a:t/>
+            </a:r>
           </a:p>
         </p:txBody>
       </p:sp>
@@ -8728,11 +8603,16 @@
           <a:bodyPr rtlCol="0" anchor="ctr" wrap="square"/>
           <a:lstStyle/>
           <a:p>
-            <a:pPr algn="ctr">
-              <a:defRPr sz="700" b="0">
+            <a:pPr algn="ctr"/>
+            <a:r>
+              <a:rPr sz="700" b="0">
+                <a:solidFill>
+                  <a:srgbClr val="333333"/>
+                </a:solidFill>
                 <a:latin typeface="Calibri"/>
-              </a:defRPr>
-            </a:pPr>
+              </a:rPr>
+              <a:t/>
+            </a:r>
           </a:p>
         </p:txBody>
       </p:sp>
@@ -8777,11 +8657,16 @@
           <a:bodyPr rtlCol="0" anchor="ctr" wrap="square"/>
           <a:lstStyle/>
           <a:p>
-            <a:pPr algn="ctr">
-              <a:defRPr sz="700" b="0">
+            <a:pPr algn="ctr"/>
+            <a:r>
+              <a:rPr sz="700" b="0">
+                <a:solidFill>
+                  <a:srgbClr val="333333"/>
+                </a:solidFill>
                 <a:latin typeface="Calibri"/>
-              </a:defRPr>
-            </a:pPr>
+              </a:rPr>
+              <a:t/>
+            </a:r>
           </a:p>
         </p:txBody>
       </p:sp>
@@ -8826,11 +8711,16 @@
           <a:bodyPr rtlCol="0" anchor="ctr" wrap="square"/>
           <a:lstStyle/>
           <a:p>
-            <a:pPr algn="ctr">
-              <a:defRPr sz="700" b="0">
+            <a:pPr algn="ctr"/>
+            <a:r>
+              <a:rPr sz="700" b="0">
+                <a:solidFill>
+                  <a:srgbClr val="333333"/>
+                </a:solidFill>
                 <a:latin typeface="Calibri"/>
-              </a:defRPr>
-            </a:pPr>
+              </a:rPr>
+              <a:t/>
+            </a:r>
           </a:p>
         </p:txBody>
       </p:sp>
@@ -8875,11 +8765,16 @@
           <a:bodyPr rtlCol="0" anchor="ctr" wrap="square"/>
           <a:lstStyle/>
           <a:p>
-            <a:pPr algn="ctr">
-              <a:defRPr sz="700" b="0">
+            <a:pPr algn="ctr"/>
+            <a:r>
+              <a:rPr sz="700" b="0">
+                <a:solidFill>
+                  <a:srgbClr val="333333"/>
+                </a:solidFill>
                 <a:latin typeface="Calibri"/>
-              </a:defRPr>
-            </a:pPr>
+              </a:rPr>
+              <a:t/>
+            </a:r>
           </a:p>
         </p:txBody>
       </p:sp>
@@ -8924,11 +8819,16 @@
           <a:bodyPr rtlCol="0" anchor="ctr" wrap="square"/>
           <a:lstStyle/>
           <a:p>
-            <a:pPr algn="ctr">
-              <a:defRPr sz="700" b="0">
+            <a:pPr algn="ctr"/>
+            <a:r>
+              <a:rPr sz="700" b="0">
+                <a:solidFill>
+                  <a:srgbClr val="333333"/>
+                </a:solidFill>
                 <a:latin typeface="Calibri"/>
-              </a:defRPr>
-            </a:pPr>
+              </a:rPr>
+              <a:t/>
+            </a:r>
           </a:p>
         </p:txBody>
       </p:sp>
@@ -8973,11 +8873,16 @@
           <a:bodyPr rtlCol="0" anchor="ctr" wrap="square"/>
           <a:lstStyle/>
           <a:p>
-            <a:pPr algn="ctr">
-              <a:defRPr sz="700" b="0">
+            <a:pPr algn="ctr"/>
+            <a:r>
+              <a:rPr sz="700" b="0">
+                <a:solidFill>
+                  <a:srgbClr val="333333"/>
+                </a:solidFill>
                 <a:latin typeface="Calibri"/>
-              </a:defRPr>
-            </a:pPr>
+              </a:rPr>
+              <a:t/>
+            </a:r>
           </a:p>
         </p:txBody>
       </p:sp>
@@ -9022,11 +8927,16 @@
           <a:bodyPr rtlCol="0" anchor="ctr" wrap="square"/>
           <a:lstStyle/>
           <a:p>
-            <a:pPr algn="ctr">
-              <a:defRPr sz="700" b="0">
+            <a:pPr algn="ctr"/>
+            <a:r>
+              <a:rPr sz="700" b="0">
+                <a:solidFill>
+                  <a:srgbClr val="333333"/>
+                </a:solidFill>
                 <a:latin typeface="Calibri"/>
-              </a:defRPr>
-            </a:pPr>
+              </a:rPr>
+              <a:t/>
+            </a:r>
           </a:p>
         </p:txBody>
       </p:sp>
@@ -9071,11 +8981,16 @@
           <a:bodyPr rtlCol="0" anchor="ctr" wrap="square"/>
           <a:lstStyle/>
           <a:p>
-            <a:pPr algn="ctr">
-              <a:defRPr sz="700" b="0">
+            <a:pPr algn="ctr"/>
+            <a:r>
+              <a:rPr sz="700" b="0">
+                <a:solidFill>
+                  <a:srgbClr val="333333"/>
+                </a:solidFill>
                 <a:latin typeface="Calibri"/>
-              </a:defRPr>
-            </a:pPr>
+              </a:rPr>
+              <a:t/>
+            </a:r>
           </a:p>
         </p:txBody>
       </p:sp>
@@ -9120,11 +9035,16 @@
           <a:bodyPr rtlCol="0" anchor="ctr" wrap="square"/>
           <a:lstStyle/>
           <a:p>
-            <a:pPr algn="ctr">
-              <a:defRPr sz="700" b="0">
+            <a:pPr algn="ctr"/>
+            <a:r>
+              <a:rPr sz="700" b="0">
+                <a:solidFill>
+                  <a:srgbClr val="333333"/>
+                </a:solidFill>
                 <a:latin typeface="Calibri"/>
-              </a:defRPr>
-            </a:pPr>
+              </a:rPr>
+              <a:t/>
+            </a:r>
           </a:p>
         </p:txBody>
       </p:sp>
@@ -9169,11 +9089,16 @@
           <a:bodyPr rtlCol="0" anchor="ctr" wrap="square"/>
           <a:lstStyle/>
           <a:p>
-            <a:pPr algn="ctr">
-              <a:defRPr sz="700" b="0">
+            <a:pPr algn="ctr"/>
+            <a:r>
+              <a:rPr sz="700" b="0">
+                <a:solidFill>
+                  <a:srgbClr val="333333"/>
+                </a:solidFill>
                 <a:latin typeface="Calibri"/>
-              </a:defRPr>
-            </a:pPr>
+              </a:rPr>
+              <a:t/>
+            </a:r>
           </a:p>
         </p:txBody>
       </p:sp>
@@ -9218,11 +9143,16 @@
           <a:bodyPr rtlCol="0" anchor="ctr" wrap="square"/>
           <a:lstStyle/>
           <a:p>
-            <a:pPr algn="ctr">
-              <a:defRPr sz="700" b="0">
+            <a:pPr algn="ctr"/>
+            <a:r>
+              <a:rPr sz="700" b="0">
+                <a:solidFill>
+                  <a:srgbClr val="333333"/>
+                </a:solidFill>
                 <a:latin typeface="Calibri"/>
-              </a:defRPr>
-            </a:pPr>
+              </a:rPr>
+              <a:t/>
+            </a:r>
           </a:p>
         </p:txBody>
       </p:sp>
@@ -9267,11 +9197,16 @@
           <a:bodyPr rtlCol="0" anchor="ctr" wrap="square"/>
           <a:lstStyle/>
           <a:p>
-            <a:pPr algn="ctr">
-              <a:defRPr sz="700" b="0">
+            <a:pPr algn="ctr"/>
+            <a:r>
+              <a:rPr sz="700" b="0">
+                <a:solidFill>
+                  <a:srgbClr val="333333"/>
+                </a:solidFill>
                 <a:latin typeface="Calibri"/>
-              </a:defRPr>
-            </a:pPr>
+              </a:rPr>
+              <a:t/>
+            </a:r>
           </a:p>
         </p:txBody>
       </p:sp>
@@ -9316,11 +9251,16 @@
           <a:bodyPr rtlCol="0" anchor="ctr" wrap="square"/>
           <a:lstStyle/>
           <a:p>
-            <a:pPr algn="ctr">
-              <a:defRPr sz="700" b="0">
+            <a:pPr algn="ctr"/>
+            <a:r>
+              <a:rPr sz="700" b="0">
+                <a:solidFill>
+                  <a:srgbClr val="333333"/>
+                </a:solidFill>
                 <a:latin typeface="Calibri"/>
-              </a:defRPr>
-            </a:pPr>
+              </a:rPr>
+              <a:t/>
+            </a:r>
           </a:p>
         </p:txBody>
       </p:sp>
@@ -9365,11 +9305,16 @@
           <a:bodyPr rtlCol="0" anchor="ctr" wrap="square"/>
           <a:lstStyle/>
           <a:p>
-            <a:pPr algn="ctr">
-              <a:defRPr sz="700" b="0">
+            <a:pPr algn="ctr"/>
+            <a:r>
+              <a:rPr sz="700" b="0">
+                <a:solidFill>
+                  <a:srgbClr val="333333"/>
+                </a:solidFill>
                 <a:latin typeface="Calibri"/>
-              </a:defRPr>
-            </a:pPr>
+              </a:rPr>
+              <a:t/>
+            </a:r>
           </a:p>
         </p:txBody>
       </p:sp>
@@ -9414,11 +9359,16 @@
           <a:bodyPr rtlCol="0" anchor="ctr" wrap="square"/>
           <a:lstStyle/>
           <a:p>
-            <a:pPr algn="ctr">
-              <a:defRPr sz="700" b="0">
+            <a:pPr algn="ctr"/>
+            <a:r>
+              <a:rPr sz="700" b="0">
+                <a:solidFill>
+                  <a:srgbClr val="333333"/>
+                </a:solidFill>
                 <a:latin typeface="Calibri"/>
-              </a:defRPr>
-            </a:pPr>
+              </a:rPr>
+              <a:t/>
+            </a:r>
           </a:p>
         </p:txBody>
       </p:sp>
@@ -9463,11 +9413,16 @@
           <a:bodyPr rtlCol="0" anchor="ctr" wrap="square"/>
           <a:lstStyle/>
           <a:p>
-            <a:pPr algn="ctr">
-              <a:defRPr sz="700" b="0">
+            <a:pPr algn="ctr"/>
+            <a:r>
+              <a:rPr sz="700" b="0">
+                <a:solidFill>
+                  <a:srgbClr val="333333"/>
+                </a:solidFill>
                 <a:latin typeface="Calibri"/>
-              </a:defRPr>
-            </a:pPr>
+              </a:rPr>
+              <a:t/>
+            </a:r>
           </a:p>
         </p:txBody>
       </p:sp>
@@ -9512,12 +9467,14 @@
           <a:bodyPr rtlCol="0" anchor="ctr" wrap="square"/>
           <a:lstStyle/>
           <a:p>
-            <a:pPr algn="ctr">
-              <a:defRPr sz="700" b="0">
+            <a:pPr algn="ctr"/>
+            <a:r>
+              <a:rPr sz="700" b="0">
+                <a:solidFill>
+                  <a:srgbClr val="333333"/>
+                </a:solidFill>
                 <a:latin typeface="Calibri"/>
-              </a:defRPr>
-            </a:pPr>
-            <a:r>
+              </a:rPr>
               <a:t>...</a:t>
             </a:r>
           </a:p>
@@ -9564,12 +9521,14 @@
           <a:bodyPr rtlCol="0" anchor="ctr" wrap="square"/>
           <a:lstStyle/>
           <a:p>
-            <a:pPr algn="ctr">
-              <a:defRPr sz="1400" b="1">
+            <a:pPr algn="ctr"/>
+            <a:r>
+              <a:rPr sz="1400" b="1">
+                <a:solidFill>
+                  <a:srgbClr val="333333"/>
+                </a:solidFill>
                 <a:latin typeface="Calibri"/>
-              </a:defRPr>
-            </a:pPr>
-            <a:r>
+              </a:rPr>
               <a:t>ICR = 1/50 = 0.02 (2%)</a:t>
             </a:r>
           </a:p>
@@ -9616,20 +9575,38 @@
           <a:bodyPr rtlCol="0" anchor="ctr" wrap="square"/>
           <a:lstStyle/>
           <a:p>
-            <a:pPr algn="ctr">
-              <a:defRPr sz="1300" b="1">
+            <a:pPr algn="ctr"/>
+            <a:r>
+              <a:rPr sz="1300" b="1">
+                <a:solidFill>
+                  <a:srgbClr val="333333"/>
+                </a:solidFill>
                 <a:latin typeface="Calibri"/>
-              </a:defRPr>
-            </a:pPr>
-            <a:r>
+              </a:rPr>
               <a:t>Same endpoint, same effect size estimate</a:t>
             </a:r>
-            <a:br/>
-            <a:r>
+          </a:p>
+          <a:p>
+            <a:pPr algn="ctr"/>
+            <a:r>
+              <a:rPr sz="1300" b="1">
+                <a:solidFill>
+                  <a:srgbClr val="333333"/>
+                </a:solidFill>
+                <a:latin typeface="Calibri"/>
+              </a:rPr>
               <a:t>→ But endpoint represents 10% vs 2% of the data space</a:t>
             </a:r>
-            <a:br/>
-            <a:r>
+          </a:p>
+          <a:p>
+            <a:pPr algn="ctr"/>
+            <a:r>
+              <a:rPr sz="1300" b="1">
+                <a:solidFill>
+                  <a:srgbClr val="333333"/>
+                </a:solidFill>
+                <a:latin typeface="Calibri"/>
+              </a:rPr>
               <a:t>→ ICRD = 0.08 → Are these truly comparable for pooling?</a:t>
             </a:r>
           </a:p>
@@ -9904,15 +9881,14 @@
                     <a:bodyPr/>
                     <a:lstStyle/>
                     <a:p>
-                      <a:pPr algn="ctr">
-                        <a:defRPr sz="1100" b="1">
+                      <a:pPr algn="ctr"/>
+                      <a:r>
+                        <a:rPr sz="1100" b="1">
                           <a:solidFill>
                             <a:srgbClr val="FFFFFF"/>
                           </a:solidFill>
                           <a:latin typeface="Calibri"/>
-                        </a:defRPr>
-                      </a:pPr>
-                      <a:r>
+                        </a:rPr>
                         <a:t>Strategy</a:t>
                       </a:r>
                     </a:p>
@@ -9928,15 +9904,14 @@
                     <a:bodyPr/>
                     <a:lstStyle/>
                     <a:p>
-                      <a:pPr algn="ctr">
-                        <a:defRPr sz="1100" b="1">
+                      <a:pPr algn="ctr"/>
+                      <a:r>
+                        <a:rPr sz="1100" b="1">
                           <a:solidFill>
                             <a:srgbClr val="FFFFFF"/>
                           </a:solidFill>
                           <a:latin typeface="Calibri"/>
-                        </a:defRPr>
-                      </a:pPr>
-                      <a:r>
+                        </a:rPr>
                         <a:t>Mean to conclusion</a:t>
                       </a:r>
                     </a:p>
@@ -9952,15 +9927,14 @@
                     <a:bodyPr/>
                     <a:lstStyle/>
                     <a:p>
-                      <a:pPr algn="ctr">
-                        <a:defRPr sz="1100" b="1">
+                      <a:pPr algn="ctr"/>
+                      <a:r>
+                        <a:rPr sz="1100" b="1">
                           <a:solidFill>
                             <a:srgbClr val="FFFFFF"/>
                           </a:solidFill>
                           <a:latin typeface="Calibri"/>
-                        </a:defRPr>
-                      </a:pPr>
-                      <a:r>
+                        </a:rPr>
                         <a:t>Median</a:t>
                       </a:r>
                     </a:p>
@@ -9976,15 +9950,14 @@
                     <a:bodyPr/>
                     <a:lstStyle/>
                     <a:p>
-                      <a:pPr algn="ctr">
-                        <a:defRPr sz="1100" b="1">
+                      <a:pPr algn="ctr"/>
+                      <a:r>
+                        <a:rPr sz="1100" b="1">
                           <a:solidFill>
                             <a:srgbClr val="FFFFFF"/>
                           </a:solidFill>
                           <a:latin typeface="Calibri"/>
-                        </a:defRPr>
-                      </a:pPr>
-                      <a:r>
+                        </a:rPr>
                         <a:t>% by 5</a:t>
                       </a:r>
                     </a:p>
@@ -10000,15 +9973,14 @@
                     <a:bodyPr/>
                     <a:lstStyle/>
                     <a:p>
-                      <a:pPr algn="ctr">
-                        <a:defRPr sz="1100" b="1">
+                      <a:pPr algn="ctr"/>
+                      <a:r>
+                        <a:rPr sz="1100" b="1">
                           <a:solidFill>
                             <a:srgbClr val="FFFFFF"/>
                           </a:solidFill>
                           <a:latin typeface="Calibri"/>
-                        </a:defRPr>
-                      </a:pPr>
-                      <a:r>
+                        </a:rPr>
                         <a:t>% by 10</a:t>
                       </a:r>
                     </a:p>
@@ -10024,15 +9996,14 @@
                     <a:bodyPr/>
                     <a:lstStyle/>
                     <a:p>
-                      <a:pPr algn="ctr">
-                        <a:defRPr sz="1100" b="1">
+                      <a:pPr algn="ctr"/>
+                      <a:r>
+                        <a:rPr sz="1100" b="1">
                           <a:solidFill>
                             <a:srgbClr val="FFFFFF"/>
                           </a:solidFill>
                           <a:latin typeface="Calibri"/>
-                        </a:defRPr>
-                      </a:pPr>
-                      <a:r>
+                        </a:rPr>
                         <a:t>Mean to I²&lt;25%</a:t>
                       </a:r>
                     </a:p>
@@ -10050,12 +10021,11 @@
                     <a:bodyPr/>
                     <a:lstStyle/>
                     <a:p>
-                      <a:pPr algn="ctr">
-                        <a:defRPr sz="1000">
-                          <a:latin typeface="Calibri"/>
-                        </a:defRPr>
-                      </a:pPr>
-                      <a:r>
+                      <a:pPr algn="ctr"/>
+                      <a:r>
+                        <a:rPr sz="1000">
+                          <a:latin typeface="Calibri"/>
+                        </a:rPr>
                         <a:t>Random</a:t>
                       </a:r>
                     </a:p>
@@ -10071,12 +10041,11 @@
                     <a:bodyPr/>
                     <a:lstStyle/>
                     <a:p>
-                      <a:pPr algn="ctr">
-                        <a:defRPr sz="1000">
-                          <a:latin typeface="Calibri"/>
-                        </a:defRPr>
-                      </a:pPr>
-                      <a:r>
+                      <a:pPr algn="ctr"/>
+                      <a:r>
+                        <a:rPr sz="1000">
+                          <a:latin typeface="Calibri"/>
+                        </a:rPr>
                         <a:t>3.94</a:t>
                       </a:r>
                     </a:p>
@@ -10092,12 +10061,11 @@
                     <a:bodyPr/>
                     <a:lstStyle/>
                     <a:p>
-                      <a:pPr algn="ctr">
-                        <a:defRPr sz="1000">
-                          <a:latin typeface="Calibri"/>
-                        </a:defRPr>
-                      </a:pPr>
-                      <a:r>
+                      <a:pPr algn="ctr"/>
+                      <a:r>
+                        <a:rPr sz="1000">
+                          <a:latin typeface="Calibri"/>
+                        </a:rPr>
                         <a:t>3.0</a:t>
                       </a:r>
                     </a:p>
@@ -10113,12 +10081,11 @@
                     <a:bodyPr/>
                     <a:lstStyle/>
                     <a:p>
-                      <a:pPr algn="ctr">
-                        <a:defRPr sz="1000">
-                          <a:latin typeface="Calibri"/>
-                        </a:defRPr>
-                      </a:pPr>
-                      <a:r>
+                      <a:pPr algn="ctr"/>
+                      <a:r>
+                        <a:rPr sz="1000">
+                          <a:latin typeface="Calibri"/>
+                        </a:rPr>
                         <a:t>81.4%</a:t>
                       </a:r>
                     </a:p>
@@ -10134,12 +10101,11 @@
                     <a:bodyPr/>
                     <a:lstStyle/>
                     <a:p>
-                      <a:pPr algn="ctr">
-                        <a:defRPr sz="1000">
-                          <a:latin typeface="Calibri"/>
-                        </a:defRPr>
-                      </a:pPr>
-                      <a:r>
+                      <a:pPr algn="ctr"/>
+                      <a:r>
+                        <a:rPr sz="1000">
+                          <a:latin typeface="Calibri"/>
+                        </a:rPr>
                         <a:t>97.2%</a:t>
                       </a:r>
                     </a:p>
@@ -10155,12 +10121,11 @@
                     <a:bodyPr/>
                     <a:lstStyle/>
                     <a:p>
-                      <a:pPr algn="ctr">
-                        <a:defRPr sz="1000">
-                          <a:latin typeface="Calibri"/>
-                        </a:defRPr>
-                      </a:pPr>
-                      <a:r>
+                      <a:pPr algn="ctr"/>
+                      <a:r>
+                        <a:rPr sz="1000">
+                          <a:latin typeface="Calibri"/>
+                        </a:rPr>
                         <a:t>3.19</a:t>
                       </a:r>
                     </a:p>
@@ -10178,12 +10143,11 @@
                     <a:bodyPr/>
                     <a:lstStyle/>
                     <a:p>
-                      <a:pPr algn="ctr">
-                        <a:defRPr sz="1000">
-                          <a:latin typeface="Calibri"/>
-                        </a:defRPr>
-                      </a:pPr>
-                      <a:r>
+                      <a:pPr algn="ctr"/>
+                      <a:r>
+                        <a:rPr sz="1000">
+                          <a:latin typeface="Calibri"/>
+                        </a:rPr>
                         <a:t>ICR-matched</a:t>
                       </a:r>
                     </a:p>
@@ -10195,12 +10159,11 @@
                     <a:bodyPr/>
                     <a:lstStyle/>
                     <a:p>
-                      <a:pPr algn="ctr">
-                        <a:defRPr sz="1000">
-                          <a:latin typeface="Calibri"/>
-                        </a:defRPr>
-                      </a:pPr>
-                      <a:r>
+                      <a:pPr algn="ctr"/>
+                      <a:r>
+                        <a:rPr sz="1000">
+                          <a:latin typeface="Calibri"/>
+                        </a:rPr>
                         <a:t>3.91</a:t>
                       </a:r>
                     </a:p>
@@ -10212,12 +10175,11 @@
                     <a:bodyPr/>
                     <a:lstStyle/>
                     <a:p>
-                      <a:pPr algn="ctr">
-                        <a:defRPr sz="1000">
-                          <a:latin typeface="Calibri"/>
-                        </a:defRPr>
-                      </a:pPr>
-                      <a:r>
+                      <a:pPr algn="ctr"/>
+                      <a:r>
+                        <a:rPr sz="1000">
+                          <a:latin typeface="Calibri"/>
+                        </a:rPr>
                         <a:t>3.0</a:t>
                       </a:r>
                     </a:p>
@@ -10229,12 +10191,11 @@
                     <a:bodyPr/>
                     <a:lstStyle/>
                     <a:p>
-                      <a:pPr algn="ctr">
-                        <a:defRPr sz="1000">
-                          <a:latin typeface="Calibri"/>
-                        </a:defRPr>
-                      </a:pPr>
-                      <a:r>
+                      <a:pPr algn="ctr"/>
+                      <a:r>
+                        <a:rPr sz="1000">
+                          <a:latin typeface="Calibri"/>
+                        </a:rPr>
                         <a:t>78.0%</a:t>
                       </a:r>
                     </a:p>
@@ -10246,12 +10207,11 @@
                     <a:bodyPr/>
                     <a:lstStyle/>
                     <a:p>
-                      <a:pPr algn="ctr">
-                        <a:defRPr sz="1000">
-                          <a:latin typeface="Calibri"/>
-                        </a:defRPr>
-                      </a:pPr>
-                      <a:r>
+                      <a:pPr algn="ctr"/>
+                      <a:r>
+                        <a:rPr sz="1000">
+                          <a:latin typeface="Calibri"/>
+                        </a:rPr>
                         <a:t>97.6%</a:t>
                       </a:r>
                     </a:p>
@@ -10263,12 +10223,11 @@
                     <a:bodyPr/>
                     <a:lstStyle/>
                     <a:p>
-                      <a:pPr algn="ctr">
-                        <a:defRPr sz="1000">
-                          <a:latin typeface="Calibri"/>
-                        </a:defRPr>
-                      </a:pPr>
-                      <a:r>
+                      <a:pPr algn="ctr"/>
+                      <a:r>
+                        <a:rPr sz="1000">
+                          <a:latin typeface="Calibri"/>
+                        </a:rPr>
                         <a:t>3.20</a:t>
                       </a:r>
                     </a:p>
@@ -10282,12 +10241,11 @@
                     <a:bodyPr/>
                     <a:lstStyle/>
                     <a:p>
-                      <a:pPr algn="ctr">
-                        <a:defRPr sz="1000">
-                          <a:latin typeface="Calibri"/>
-                        </a:defRPr>
-                      </a:pPr>
-                      <a:r>
+                      <a:pPr algn="ctr"/>
+                      <a:r>
+                        <a:rPr sz="1000">
+                          <a:latin typeface="Calibri"/>
+                        </a:rPr>
                         <a:t>LINKO optimized</a:t>
                       </a:r>
                     </a:p>
@@ -10303,12 +10261,11 @@
                     <a:bodyPr/>
                     <a:lstStyle/>
                     <a:p>
-                      <a:pPr algn="ctr">
-                        <a:defRPr sz="1000">
-                          <a:latin typeface="Calibri"/>
-                        </a:defRPr>
-                      </a:pPr>
-                      <a:r>
+                      <a:pPr algn="ctr"/>
+                      <a:r>
+                        <a:rPr sz="1000">
+                          <a:latin typeface="Calibri"/>
+                        </a:rPr>
                         <a:t>4.00</a:t>
                       </a:r>
                     </a:p>
@@ -10324,12 +10281,11 @@
                     <a:bodyPr/>
                     <a:lstStyle/>
                     <a:p>
-                      <a:pPr algn="ctr">
-                        <a:defRPr sz="1000">
-                          <a:latin typeface="Calibri"/>
-                        </a:defRPr>
-                      </a:pPr>
-                      <a:r>
+                      <a:pPr algn="ctr"/>
+                      <a:r>
+                        <a:rPr sz="1000">
+                          <a:latin typeface="Calibri"/>
+                        </a:rPr>
                         <a:t>3.0</a:t>
                       </a:r>
                     </a:p>
@@ -10345,12 +10301,11 @@
                     <a:bodyPr/>
                     <a:lstStyle/>
                     <a:p>
-                      <a:pPr algn="ctr">
-                        <a:defRPr sz="1000">
-                          <a:latin typeface="Calibri"/>
-                        </a:defRPr>
-                      </a:pPr>
-                      <a:r>
+                      <a:pPr algn="ctr"/>
+                      <a:r>
+                        <a:rPr sz="1000">
+                          <a:latin typeface="Calibri"/>
+                        </a:rPr>
                         <a:t>77.6%</a:t>
                       </a:r>
                     </a:p>
@@ -10366,12 +10321,11 @@
                     <a:bodyPr/>
                     <a:lstStyle/>
                     <a:p>
-                      <a:pPr algn="ctr">
-                        <a:defRPr sz="1000">
-                          <a:latin typeface="Calibri"/>
-                        </a:defRPr>
-                      </a:pPr>
-                      <a:r>
+                      <a:pPr algn="ctr"/>
+                      <a:r>
+                        <a:rPr sz="1000">
+                          <a:latin typeface="Calibri"/>
+                        </a:rPr>
                         <a:t>97.6%</a:t>
                       </a:r>
                     </a:p>
@@ -10387,12 +10341,11 @@
                     <a:bodyPr/>
                     <a:lstStyle/>
                     <a:p>
-                      <a:pPr algn="ctr">
-                        <a:defRPr sz="1000">
-                          <a:latin typeface="Calibri"/>
-                        </a:defRPr>
-                      </a:pPr>
-                      <a:r>
+                      <a:pPr algn="ctr"/>
+                      <a:r>
+                        <a:rPr sz="1000">
+                          <a:latin typeface="Calibri"/>
+                        </a:rPr>
                         <a:t>3.14</a:t>
                       </a:r>
                     </a:p>
@@ -10430,15 +10383,13 @@
           </a:bodyPr>
           <a:lstStyle/>
           <a:p>
-            <a:pPr>
-              <a:defRPr sz="1000" i="1">
+            <a:r>
+              <a:rPr sz="1000" i="1">
                 <a:solidFill>
                   <a:srgbClr val="666666"/>
                 </a:solidFill>
                 <a:latin typeface="Calibri"/>
-              </a:defRPr>
-            </a:pPr>
-            <a:r>
+              </a:rPr>
               <a:t>LINKO achieved lowest mean studies for I² &lt; 25% (3.14 vs 3.19–3.20)</a:t>
             </a:r>
           </a:p>
@@ -10525,15 +10476,14 @@
                     <a:bodyPr/>
                     <a:lstStyle/>
                     <a:p>
-                      <a:pPr algn="ctr">
-                        <a:defRPr sz="1100" b="1">
+                      <a:pPr algn="ctr"/>
+                      <a:r>
+                        <a:rPr sz="1100" b="1">
                           <a:solidFill>
                             <a:srgbClr val="FFFFFF"/>
                           </a:solidFill>
                           <a:latin typeface="Calibri"/>
-                        </a:defRPr>
-                      </a:pPr>
-                      <a:r>
+                        </a:rPr>
                         <a:t>Analysis</a:t>
                       </a:r>
                     </a:p>
@@ -10549,15 +10499,14 @@
                     <a:bodyPr/>
                     <a:lstStyle/>
                     <a:p>
-                      <a:pPr algn="ctr">
-                        <a:defRPr sz="1100" b="1">
+                      <a:pPr algn="ctr"/>
+                      <a:r>
+                        <a:rPr sz="1100" b="1">
                           <a:solidFill>
                             <a:srgbClr val="FFFFFF"/>
                           </a:solidFill>
                           <a:latin typeface="Calibri"/>
-                        </a:defRPr>
-                      </a:pPr>
-                      <a:r>
+                        </a:rPr>
                         <a:t>ICR Measure</a:t>
                       </a:r>
                     </a:p>
@@ -10573,15 +10522,14 @@
                     <a:bodyPr/>
                     <a:lstStyle/>
                     <a:p>
-                      <a:pPr algn="ctr">
-                        <a:defRPr sz="1100" b="1">
+                      <a:pPr algn="ctr"/>
+                      <a:r>
+                        <a:rPr sz="1100" b="1">
                           <a:solidFill>
                             <a:srgbClr val="FFFFFF"/>
                           </a:solidFill>
                           <a:latin typeface="Calibri"/>
-                        </a:defRPr>
-                      </a:pPr>
-                      <a:r>
+                        </a:rPr>
                         <a:t>Variation (CV)</a:t>
                       </a:r>
                     </a:p>
@@ -10597,15 +10545,14 @@
                     <a:bodyPr/>
                     <a:lstStyle/>
                     <a:p>
-                      <a:pPr algn="ctr">
-                        <a:defRPr sz="1100" b="1">
+                      <a:pPr algn="ctr"/>
+                      <a:r>
+                        <a:rPr sz="1100" b="1">
                           <a:solidFill>
                             <a:srgbClr val="FFFFFF"/>
                           </a:solidFill>
                           <a:latin typeface="Calibri"/>
-                        </a:defRPr>
-                      </a:pPr>
-                      <a:r>
+                        </a:rPr>
                         <a:t>Association</a:t>
                       </a:r>
                     </a:p>
@@ -10623,12 +10570,11 @@
                     <a:bodyPr/>
                     <a:lstStyle/>
                     <a:p>
-                      <a:pPr algn="ctr">
-                        <a:defRPr sz="1000">
-                          <a:latin typeface="Calibri"/>
-                        </a:defRPr>
-                      </a:pPr>
-                      <a:r>
+                      <a:pPr algn="ctr"/>
+                      <a:r>
+                        <a:rPr sz="1000">
+                          <a:latin typeface="Calibri"/>
+                        </a:rPr>
                         <a:t>Statin therapy</a:t>
                       </a:r>
                     </a:p>
@@ -10644,12 +10590,11 @@
                     <a:bodyPr/>
                     <a:lstStyle/>
                     <a:p>
-                      <a:pPr algn="ctr">
-                        <a:defRPr sz="1000">
-                          <a:latin typeface="Calibri"/>
-                        </a:defRPr>
-                      </a:pPr>
-                      <a:r>
+                      <a:pPr algn="ctr"/>
+                      <a:r>
+                        <a:rPr sz="1000">
+                          <a:latin typeface="Calibri"/>
+                        </a:rPr>
                         <a:t>ICR_std (Approach 1)</a:t>
                       </a:r>
                     </a:p>
@@ -10665,12 +10610,11 @@
                     <a:bodyPr/>
                     <a:lstStyle/>
                     <a:p>
-                      <a:pPr algn="ctr">
-                        <a:defRPr sz="1000">
-                          <a:latin typeface="Calibri"/>
-                        </a:defRPr>
-                      </a:pPr>
-                      <a:r>
+                      <a:pPr algn="ctr"/>
+                      <a:r>
+                        <a:rPr sz="1000">
+                          <a:latin typeface="Calibri"/>
+                        </a:rPr>
                         <a:t>0.041</a:t>
                       </a:r>
                     </a:p>
@@ -10686,12 +10630,11 @@
                     <a:bodyPr/>
                     <a:lstStyle/>
                     <a:p>
-                      <a:pPr algn="ctr">
-                        <a:defRPr sz="1000">
-                          <a:latin typeface="Calibri"/>
-                        </a:defRPr>
-                      </a:pPr>
-                      <a:r>
+                      <a:pPr algn="ctr"/>
+                      <a:r>
+                        <a:rPr sz="1000">
+                          <a:latin typeface="Calibri"/>
+                        </a:rPr>
                         <a:t>I² = 0.0% (stable)</a:t>
                       </a:r>
                     </a:p>
@@ -10709,12 +10652,11 @@
                     <a:bodyPr/>
                     <a:lstStyle/>
                     <a:p>
-                      <a:pPr algn="ctr">
-                        <a:defRPr sz="1000">
-                          <a:latin typeface="Calibri"/>
-                        </a:defRPr>
-                      </a:pPr>
-                      <a:r>
+                      <a:pPr algn="ctr"/>
+                      <a:r>
+                        <a:rPr sz="1000">
+                          <a:latin typeface="Calibri"/>
+                        </a:rPr>
                         <a:t>Glucose control</a:t>
                       </a:r>
                     </a:p>
@@ -10726,12 +10668,11 @@
                     <a:bodyPr/>
                     <a:lstStyle/>
                     <a:p>
-                      <a:pPr algn="ctr">
-                        <a:defRPr sz="1000">
-                          <a:latin typeface="Calibri"/>
-                        </a:defRPr>
-                      </a:pPr>
-                      <a:r>
+                      <a:pPr algn="ctr"/>
+                      <a:r>
+                        <a:rPr sz="1000">
+                          <a:latin typeface="Calibri"/>
+                        </a:rPr>
                         <a:t>ICR_std (Approach 1)</a:t>
                       </a:r>
                     </a:p>
@@ -10743,12 +10684,11 @@
                     <a:bodyPr/>
                     <a:lstStyle/>
                     <a:p>
-                      <a:pPr algn="ctr">
-                        <a:defRPr sz="1000">
-                          <a:latin typeface="Calibri"/>
-                        </a:defRPr>
-                      </a:pPr>
-                      <a:r>
+                      <a:pPr algn="ctr"/>
+                      <a:r>
+                        <a:rPr sz="1000">
+                          <a:latin typeface="Calibri"/>
+                        </a:rPr>
                         <a:t>0.240</a:t>
                       </a:r>
                     </a:p>
@@ -10760,12 +10700,11 @@
                     <a:bodyPr/>
                     <a:lstStyle/>
                     <a:p>
-                      <a:pPr algn="ctr">
-                        <a:defRPr sz="1000">
-                          <a:latin typeface="Calibri"/>
-                        </a:defRPr>
-                      </a:pPr>
-                      <a:r>
+                      <a:pPr algn="ctr"/>
+                      <a:r>
+                        <a:rPr sz="1000">
+                          <a:latin typeface="Calibri"/>
+                        </a:rPr>
                         <a:t>I² = 17.0% (heterogeneous)</a:t>
                       </a:r>
                     </a:p>
@@ -10779,12 +10718,11 @@
                     <a:bodyPr/>
                     <a:lstStyle/>
                     <a:p>
-                      <a:pPr algn="ctr">
-                        <a:defRPr sz="1000">
-                          <a:latin typeface="Calibri"/>
-                        </a:defRPr>
-                      </a:pPr>
-                      <a:r>
+                      <a:pPr algn="ctr"/>
+                      <a:r>
+                        <a:rPr sz="1000">
+                          <a:latin typeface="Calibri"/>
+                        </a:rPr>
                         <a:t>IST (loading)</a:t>
                       </a:r>
                     </a:p>
@@ -10800,12 +10738,11 @@
                     <a:bodyPr/>
                     <a:lstStyle/>
                     <a:p>
-                      <a:pPr algn="ctr">
-                        <a:defRPr sz="1000">
-                          <a:latin typeface="Calibri"/>
-                        </a:defRPr>
-                      </a:pPr>
-                      <a:r>
+                      <a:pPr algn="ctr"/>
+                      <a:r>
+                        <a:rPr sz="1000">
+                          <a:latin typeface="Calibri"/>
+                        </a:rPr>
                         <a:t>ICR_pca (Approach 2)</a:t>
                       </a:r>
                     </a:p>
@@ -10821,12 +10758,11 @@
                     <a:bodyPr/>
                     <a:lstStyle/>
                     <a:p>
-                      <a:pPr algn="ctr">
-                        <a:defRPr sz="1000">
-                          <a:latin typeface="Calibri"/>
-                        </a:defRPr>
-                      </a:pPr>
-                      <a:r>
+                      <a:pPr algn="ctr"/>
+                      <a:r>
+                        <a:rPr sz="1000">
+                          <a:latin typeface="Calibri"/>
+                        </a:rPr>
                         <a:t>0.360</a:t>
                       </a:r>
                     </a:p>
@@ -10842,12 +10778,11 @@
                     <a:bodyPr/>
                     <a:lstStyle/>
                     <a:p>
-                      <a:pPr algn="ctr">
-                        <a:defRPr sz="1000">
-                          <a:latin typeface="Calibri"/>
-                        </a:defRPr>
-                      </a:pPr>
-                      <a:r>
+                      <a:pPr algn="ctr"/>
+                      <a:r>
+                        <a:rPr sz="1000">
+                          <a:latin typeface="Calibri"/>
+                        </a:rPr>
                         <a:t>r = 0.27 with mortality</a:t>
                       </a:r>
                     </a:p>
@@ -10865,12 +10800,11 @@
                     <a:bodyPr/>
                     <a:lstStyle/>
                     <a:p>
-                      <a:pPr algn="ctr">
-                        <a:defRPr sz="1000">
-                          <a:latin typeface="Calibri"/>
-                        </a:defRPr>
-                      </a:pPr>
-                      <a:r>
+                      <a:pPr algn="ctr"/>
+                      <a:r>
+                        <a:rPr sz="1000">
+                          <a:latin typeface="Calibri"/>
+                        </a:rPr>
                         <a:t>IST (regression)</a:t>
                       </a:r>
                     </a:p>
@@ -10882,12 +10816,11 @@
                     <a:bodyPr/>
                     <a:lstStyle/>
                     <a:p>
-                      <a:pPr algn="ctr">
-                        <a:defRPr sz="1000">
-                          <a:latin typeface="Calibri"/>
-                        </a:defRPr>
-                      </a:pPr>
-                      <a:r>
+                      <a:pPr algn="ctr"/>
+                      <a:r>
+                        <a:rPr sz="1000">
+                          <a:latin typeface="Calibri"/>
+                        </a:rPr>
                         <a:t>ICR_pca_reg (Approach 2)</a:t>
                       </a:r>
                     </a:p>
@@ -10899,12 +10832,11 @@
                     <a:bodyPr/>
                     <a:lstStyle/>
                     <a:p>
-                      <a:pPr algn="ctr">
-                        <a:defRPr sz="1000">
-                          <a:latin typeface="Calibri"/>
-                        </a:defRPr>
-                      </a:pPr>
-                      <a:r>
+                      <a:pPr algn="ctr"/>
+                      <a:r>
+                        <a:rPr sz="1000">
+                          <a:latin typeface="Calibri"/>
+                        </a:rPr>
                         <a:t>0.329</a:t>
                       </a:r>
                     </a:p>
@@ -10916,12 +10848,11 @@
                     <a:bodyPr/>
                     <a:lstStyle/>
                     <a:p>
-                      <a:pPr algn="ctr">
-                        <a:defRPr sz="1000">
-                          <a:latin typeface="Calibri"/>
-                        </a:defRPr>
-                      </a:pPr>
-                      <a:r>
+                      <a:pPr algn="ctr"/>
+                      <a:r>
+                        <a:rPr sz="1000">
+                          <a:latin typeface="Calibri"/>
+                        </a:rPr>
                         <a:t>r = 0.90 with mortality</a:t>
                       </a:r>
                     </a:p>
@@ -11025,23 +10956,38 @@
           <a:bodyPr rtlCol="0" anchor="ctr" wrap="square"/>
           <a:lstStyle/>
           <a:p>
-            <a:pPr algn="ctr">
-              <a:defRPr sz="1400" b="1">
+            <a:pPr algn="ctr"/>
+            <a:r>
+              <a:rPr sz="1400" b="1">
                 <a:solidFill>
                   <a:srgbClr val="FFFFFF"/>
                 </a:solidFill>
                 <a:latin typeface="Calibri"/>
-              </a:defRPr>
-            </a:pPr>
-            <a:r>
+              </a:rPr>
               <a:t>LINKO</a:t>
             </a:r>
-            <a:br/>
-            <a:r>
+          </a:p>
+          <a:p>
+            <a:pPr algn="ctr"/>
+            <a:r>
+              <a:rPr sz="1400" b="1">
+                <a:solidFill>
+                  <a:srgbClr val="FFFFFF"/>
+                </a:solidFill>
+                <a:latin typeface="Calibri"/>
+              </a:rPr>
               <a:t>(Latent Information Normalization</a:t>
             </a:r>
-            <a:br/>
-            <a:r>
+          </a:p>
+          <a:p>
+            <a:pPr algn="ctr"/>
+            <a:r>
+              <a:rPr sz="1400" b="1">
+                <a:solidFill>
+                  <a:srgbClr val="FFFFFF"/>
+                </a:solidFill>
+                <a:latin typeface="Calibri"/>
+              </a:rPr>
               <a:t>for Key Outcomes)</a:t>
             </a:r>
           </a:p>
@@ -11088,16 +11034,26 @@
           <a:bodyPr rtlCol="0" anchor="ctr" wrap="square"/>
           <a:lstStyle/>
           <a:p>
-            <a:pPr algn="ctr">
-              <a:defRPr sz="1300" b="0">
+            <a:pPr algn="ctr"/>
+            <a:r>
+              <a:rPr sz="1300" b="0">
+                <a:solidFill>
+                  <a:srgbClr val="333333"/>
+                </a:solidFill>
                 <a:latin typeface="Calibri"/>
-              </a:defRPr>
-            </a:pPr>
-            <a:r>
+              </a:rPr>
               <a:t>Core Question: Does the endpoint carry the same</a:t>
             </a:r>
-            <a:br/>
-            <a:r>
+          </a:p>
+          <a:p>
+            <a:pPr algn="ctr"/>
+            <a:r>
+              <a:rPr sz="1300" b="0">
+                <a:solidFill>
+                  <a:srgbClr val="333333"/>
+                </a:solidFill>
+                <a:latin typeface="Calibri"/>
+              </a:rPr>
               <a:t>informational weight in every study?</a:t>
             </a:r>
           </a:p>
@@ -11216,15 +11172,14 @@
           <a:bodyPr rtlCol="0" anchor="ctr" wrap="square"/>
           <a:lstStyle/>
           <a:p>
-            <a:pPr algn="ctr">
-              <a:defRPr sz="1300" b="1">
+            <a:pPr algn="ctr"/>
+            <a:r>
+              <a:rPr sz="1300" b="1">
                 <a:solidFill>
                   <a:srgbClr val="FFFFFF"/>
                 </a:solidFill>
                 <a:latin typeface="Calibri"/>
-              </a:defRPr>
-            </a:pPr>
-            <a:r>
+              </a:rPr>
               <a:t>Approach 1: Variance-based ICR</a:t>
             </a:r>
           </a:p>
@@ -11271,16 +11226,26 @@
           <a:bodyPr rtlCol="0" anchor="ctr" wrap="square"/>
           <a:lstStyle/>
           <a:p>
-            <a:pPr algn="ctr">
-              <a:defRPr sz="1100" b="0">
+            <a:pPr algn="ctr"/>
+            <a:r>
+              <a:rPr sz="1100" b="0">
+                <a:solidFill>
+                  <a:srgbClr val="333333"/>
+                </a:solidFill>
                 <a:latin typeface="Calibri"/>
-              </a:defRPr>
-            </a:pPr>
-            <a:r>
+              </a:rPr>
               <a:t>ICR_std = d / D</a:t>
             </a:r>
-            <a:br/>
-            <a:r>
+          </a:p>
+          <a:p>
+            <a:pPr algn="ctr"/>
+            <a:r>
+              <a:rPr sz="1100" b="0">
+                <a:solidFill>
+                  <a:srgbClr val="333333"/>
+                </a:solidFill>
+                <a:latin typeface="Calibri"/>
+              </a:rPr>
               <a:t>Computable from published Table 1</a:t>
             </a:r>
           </a:p>
@@ -11327,15 +11292,14 @@
           <a:bodyPr rtlCol="0" anchor="ctr" wrap="square"/>
           <a:lstStyle/>
           <a:p>
-            <a:pPr algn="ctr">
-              <a:defRPr sz="1300" b="1">
+            <a:pPr algn="ctr"/>
+            <a:r>
+              <a:rPr sz="1300" b="1">
                 <a:solidFill>
                   <a:srgbClr val="FFFFFF"/>
                 </a:solidFill>
                 <a:latin typeface="Calibri"/>
-              </a:defRPr>
-            </a:pPr>
-            <a:r>
+              </a:rPr>
               <a:t>Approach 2: PCA-based ICR</a:t>
             </a:r>
           </a:p>
@@ -11382,16 +11346,26 @@
           <a:bodyPr rtlCol="0" anchor="ctr" wrap="square"/>
           <a:lstStyle/>
           <a:p>
-            <a:pPr algn="ctr">
-              <a:defRPr sz="1100" b="0">
+            <a:pPr algn="ctr"/>
+            <a:r>
+              <a:rPr sz="1100" b="0">
+                <a:solidFill>
+                  <a:srgbClr val="333333"/>
+                </a:solidFill>
                 <a:latin typeface="Calibri"/>
-              </a:defRPr>
-            </a:pPr>
-            <a:r>
+              </a:rPr>
               <a:t>Loading-based + Regression-based</a:t>
             </a:r>
-            <a:br/>
-            <a:r>
+          </a:p>
+          <a:p>
+            <a:pPr algn="ctr"/>
+            <a:r>
+              <a:rPr sz="1100" b="0">
+                <a:solidFill>
+                  <a:srgbClr val="333333"/>
+                </a:solidFill>
+                <a:latin typeface="Calibri"/>
+              </a:rPr>
               <a:t>Requires individual patient data (IPD)</a:t>
             </a:r>
           </a:p>
@@ -11510,19 +11484,26 @@
           <a:bodyPr rtlCol="0" anchor="ctr" wrap="square"/>
           <a:lstStyle/>
           <a:p>
-            <a:pPr algn="ctr">
-              <a:defRPr sz="1200" b="1">
+            <a:pPr algn="ctr"/>
+            <a:r>
+              <a:rPr sz="1200" b="1">
                 <a:solidFill>
                   <a:srgbClr val="FFFFFF"/>
                 </a:solidFill>
                 <a:latin typeface="Calibri"/>
-              </a:defRPr>
-            </a:pPr>
-            <a:r>
+              </a:rPr>
               <a:t>ICR Discrepancy (ICRD) = max(ICR) - min(ICR)</a:t>
             </a:r>
-            <a:br/>
-            <a:r>
+          </a:p>
+          <a:p>
+            <a:pPr algn="ctr"/>
+            <a:r>
+              <a:rPr sz="1200" b="1">
+                <a:solidFill>
+                  <a:srgbClr val="FFFFFF"/>
+                </a:solidFill>
+                <a:latin typeface="Calibri"/>
+              </a:rPr>
               <a:t>+ Prism Forest Plot Visualization</a:t>
             </a:r>
           </a:p>
@@ -11569,12 +11550,14 @@
           <a:bodyPr rtlCol="0" anchor="ctr" wrap="square"/>
           <a:lstStyle/>
           <a:p>
-            <a:pPr algn="ctr">
-              <a:defRPr sz="1100" b="1">
+            <a:pPr algn="ctr"/>
+            <a:r>
+              <a:rPr sz="1100" b="1">
+                <a:solidFill>
+                  <a:srgbClr val="333333"/>
+                </a:solidFill>
                 <a:latin typeface="Calibri"/>
-              </a:defRPr>
-            </a:pPr>
-            <a:r>
+              </a:rPr>
               <a:t>Report ICRD alongside I² and τ² in meta-analyses</a:t>
             </a:r>
           </a:p>
@@ -11672,19 +11655,26 @@
           <a:bodyPr rtlCol="0" anchor="ctr" wrap="square"/>
           <a:lstStyle/>
           <a:p>
-            <a:pPr algn="ctr">
-              <a:defRPr sz="1300" b="1">
+            <a:pPr algn="ctr"/>
+            <a:r>
+              <a:rPr sz="1300" b="1">
                 <a:solidFill>
                   <a:srgbClr val="FFFFFF"/>
                 </a:solidFill>
                 <a:latin typeface="Calibri"/>
-              </a:defRPr>
-            </a:pPr>
-            <a:r>
+              </a:rPr>
               <a:t>1. Simulation</a:t>
             </a:r>
-            <a:br/>
-            <a:r>
+          </a:p>
+          <a:p>
+            <a:pPr algn="ctr"/>
+            <a:r>
+              <a:rPr sz="1300" b="1">
+                <a:solidFill>
+                  <a:srgbClr val="FFFFFF"/>
+                </a:solidFill>
+                <a:latin typeface="Calibri"/>
+              </a:rPr>
               <a:t>(Monte Carlo)</a:t>
             </a:r>
           </a:p>
@@ -11731,20 +11721,38 @@
           <a:bodyPr rtlCol="0" anchor="ctr" wrap="square"/>
           <a:lstStyle/>
           <a:p>
-            <a:pPr algn="ctr">
-              <a:defRPr sz="1000" b="0">
+            <a:pPr algn="ctr"/>
+            <a:r>
+              <a:rPr sz="1000" b="0">
+                <a:solidFill>
+                  <a:srgbClr val="333333"/>
+                </a:solidFill>
                 <a:latin typeface="Calibri"/>
-              </a:defRPr>
-            </a:pPr>
-            <a:r>
+              </a:rPr>
               <a:t>Scenario A: Uniform ICR</a:t>
             </a:r>
-            <a:br/>
-            <a:r>
+          </a:p>
+          <a:p>
+            <a:pPr algn="ctr"/>
+            <a:r>
+              <a:rPr sz="1000" b="0">
+                <a:solidFill>
+                  <a:srgbClr val="333333"/>
+                </a:solidFill>
+                <a:latin typeface="Calibri"/>
+              </a:rPr>
               <a:t>Scenario B: Heterogeneous ICR</a:t>
             </a:r>
-            <a:br/>
-            <a:r>
+          </a:p>
+          <a:p>
+            <a:pPr algn="ctr"/>
+            <a:r>
+              <a:rPr sz="1000" b="0">
+                <a:solidFill>
+                  <a:srgbClr val="333333"/>
+                </a:solidFill>
+                <a:latin typeface="Calibri"/>
+              </a:rPr>
               <a:t>Scenario C: Sequential</a:t>
             </a:r>
           </a:p>
@@ -11827,19 +11835,26 @@
           <a:bodyPr rtlCol="0" anchor="ctr" wrap="square"/>
           <a:lstStyle/>
           <a:p>
-            <a:pPr algn="ctr">
-              <a:defRPr sz="1300" b="1">
+            <a:pPr algn="ctr"/>
+            <a:r>
+              <a:rPr sz="1300" b="1">
                 <a:solidFill>
                   <a:srgbClr val="FFFFFF"/>
                 </a:solidFill>
                 <a:latin typeface="Calibri"/>
-              </a:defRPr>
-            </a:pPr>
-            <a:r>
+              </a:rPr>
               <a:t>2. Real-World</a:t>
             </a:r>
-            <a:br/>
-            <a:r>
+          </a:p>
+          <a:p>
+            <a:pPr algn="ctr"/>
+            <a:r>
+              <a:rPr sz="1300" b="1">
+                <a:solidFill>
+                  <a:srgbClr val="FFFFFF"/>
+                </a:solidFill>
+                <a:latin typeface="Calibri"/>
+              </a:rPr>
               <a:t>(Table 1 ICR)</a:t>
             </a:r>
           </a:p>
@@ -11886,16 +11901,26 @@
           <a:bodyPr rtlCol="0" anchor="ctr" wrap="square"/>
           <a:lstStyle/>
           <a:p>
-            <a:pPr algn="ctr">
-              <a:defRPr sz="1000" b="0">
+            <a:pPr algn="ctr"/>
+            <a:r>
+              <a:rPr sz="1000" b="0">
+                <a:solidFill>
+                  <a:srgbClr val="333333"/>
+                </a:solidFill>
                 <a:latin typeface="Calibri"/>
-              </a:defRPr>
-            </a:pPr>
-            <a:r>
+              </a:rPr>
               <a:t>Statin therapy (5 RCTs)</a:t>
             </a:r>
-            <a:br/>
-            <a:r>
+          </a:p>
+          <a:p>
+            <a:pPr algn="ctr"/>
+            <a:r>
+              <a:rPr sz="1000" b="0">
+                <a:solidFill>
+                  <a:srgbClr val="333333"/>
+                </a:solidFill>
+                <a:latin typeface="Calibri"/>
+              </a:rPr>
               <a:t>Glucose control (4 RCTs)</a:t>
             </a:r>
           </a:p>
@@ -11978,19 +12003,26 @@
           <a:bodyPr rtlCol="0" anchor="ctr" wrap="square"/>
           <a:lstStyle/>
           <a:p>
-            <a:pPr algn="ctr">
-              <a:defRPr sz="1300" b="1">
+            <a:pPr algn="ctr"/>
+            <a:r>
+              <a:rPr sz="1300" b="1">
                 <a:solidFill>
                   <a:srgbClr val="FFFFFF"/>
                 </a:solidFill>
                 <a:latin typeface="Calibri"/>
-              </a:defRPr>
-            </a:pPr>
-            <a:r>
+              </a:rPr>
               <a:t>3. PCA Validation</a:t>
             </a:r>
-            <a:br/>
-            <a:r>
+          </a:p>
+          <a:p>
+            <a:pPr algn="ctr"/>
+            <a:r>
+              <a:rPr sz="1300" b="1">
+                <a:solidFill>
+                  <a:srgbClr val="FFFFFF"/>
+                </a:solidFill>
+                <a:latin typeface="Calibri"/>
+              </a:rPr>
               <a:t>(IST IPD)</a:t>
             </a:r>
           </a:p>
@@ -12037,20 +12069,38 @@
           <a:bodyPr rtlCol="0" anchor="ctr" wrap="square"/>
           <a:lstStyle/>
           <a:p>
-            <a:pPr algn="ctr">
-              <a:defRPr sz="1000" b="0">
+            <a:pPr algn="ctr"/>
+            <a:r>
+              <a:rPr sz="1000" b="0">
+                <a:solidFill>
+                  <a:srgbClr val="333333"/>
+                </a:solidFill>
                 <a:latin typeface="Calibri"/>
-              </a:defRPr>
-            </a:pPr>
-            <a:r>
+              </a:rPr>
               <a:t>19,435 patients</a:t>
             </a:r>
-            <a:br/>
-            <a:r>
+          </a:p>
+          <a:p>
+            <a:pPr algn="ctr"/>
+            <a:r>
+              <a:rPr sz="1000" b="0">
+                <a:solidFill>
+                  <a:srgbClr val="333333"/>
+                </a:solidFill>
+                <a:latin typeface="Calibri"/>
+              </a:rPr>
               <a:t>8 country sub-studies</a:t>
             </a:r>
-            <a:br/>
-            <a:r>
+          </a:p>
+          <a:p>
+            <a:pPr algn="ctr"/>
+            <a:r>
+              <a:rPr sz="1000" b="0">
+                <a:solidFill>
+                  <a:srgbClr val="333333"/>
+                </a:solidFill>
+                <a:latin typeface="Calibri"/>
+              </a:rPr>
               <a:t>25 variables</a:t>
             </a:r>
           </a:p>
@@ -12133,19 +12183,26 @@
           <a:bodyPr rtlCol="0" anchor="ctr" wrap="square"/>
           <a:lstStyle/>
           <a:p>
-            <a:pPr algn="ctr">
-              <a:defRPr sz="1300" b="1">
+            <a:pPr algn="ctr"/>
+            <a:r>
+              <a:rPr sz="1300" b="1">
                 <a:solidFill>
                   <a:srgbClr val="FFFFFF"/>
                 </a:solidFill>
                 <a:latin typeface="Calibri"/>
-              </a:defRPr>
-            </a:pPr>
-            <a:r>
+              </a:rPr>
               <a:t>4. Visualization</a:t>
             </a:r>
-            <a:br/>
-            <a:r>
+          </a:p>
+          <a:p>
+            <a:pPr algn="ctr"/>
+            <a:r>
+              <a:rPr sz="1300" b="1">
+                <a:solidFill>
+                  <a:srgbClr val="FFFFFF"/>
+                </a:solidFill>
+                <a:latin typeface="Calibri"/>
+              </a:rPr>
               <a:t>(Prism Forest Plot)</a:t>
             </a:r>
           </a:p>
@@ -12192,20 +12249,38 @@
           <a:bodyPr rtlCol="0" anchor="ctr" wrap="square"/>
           <a:lstStyle/>
           <a:p>
-            <a:pPr algn="ctr">
-              <a:defRPr sz="1000" b="0">
+            <a:pPr algn="ctr"/>
+            <a:r>
+              <a:rPr sz="1000" b="0">
+                <a:solidFill>
+                  <a:srgbClr val="333333"/>
+                </a:solidFill>
                 <a:latin typeface="Calibri"/>
-              </a:defRPr>
-            </a:pPr>
-            <a:r>
+              </a:rPr>
               <a:t>Color = ICR value</a:t>
             </a:r>
-            <a:br/>
-            <a:r>
+          </a:p>
+          <a:p>
+            <a:pPr algn="ctr"/>
+            <a:r>
+              <a:rPr sz="1000" b="0">
+                <a:solidFill>
+                  <a:srgbClr val="333333"/>
+                </a:solidFill>
+                <a:latin typeface="Calibri"/>
+              </a:rPr>
               <a:t>Size = Secondary ICR</a:t>
             </a:r>
-            <a:br/>
-            <a:r>
+          </a:p>
+          <a:p>
+            <a:pPr algn="ctr"/>
+            <a:r>
+              <a:rPr sz="1000" b="0">
+                <a:solidFill>
+                  <a:srgbClr val="333333"/>
+                </a:solidFill>
+                <a:latin typeface="Calibri"/>
+              </a:rPr>
               <a:t>Side panel = ICR bars</a:t>
             </a:r>
           </a:p>
@@ -12288,19 +12363,26 @@
           <a:bodyPr rtlCol="0" anchor="ctr" wrap="square"/>
           <a:lstStyle/>
           <a:p>
-            <a:pPr algn="ctr">
-              <a:defRPr sz="1300" b="1">
+            <a:pPr algn="ctr"/>
+            <a:r>
+              <a:rPr sz="1300" b="1">
                 <a:solidFill>
                   <a:srgbClr val="FFFFFF"/>
                 </a:solidFill>
                 <a:latin typeface="Calibri"/>
-              </a:defRPr>
-            </a:pPr>
-            <a:r>
+              </a:rPr>
               <a:t>5. Convergence</a:t>
             </a:r>
-            <a:br/>
-            <a:r>
+          </a:p>
+          <a:p>
+            <a:pPr algn="ctr"/>
+            <a:r>
+              <a:rPr sz="1300" b="1">
+                <a:solidFill>
+                  <a:srgbClr val="FFFFFF"/>
+                </a:solidFill>
+                <a:latin typeface="Calibri"/>
+              </a:rPr>
               <a:t>Analysis</a:t>
             </a:r>
           </a:p>
@@ -12347,20 +12429,38 @@
           <a:bodyPr rtlCol="0" anchor="ctr" wrap="square"/>
           <a:lstStyle/>
           <a:p>
-            <a:pPr algn="ctr">
-              <a:defRPr sz="1000" b="0">
+            <a:pPr algn="ctr"/>
+            <a:r>
+              <a:rPr sz="1000" b="0">
+                <a:solidFill>
+                  <a:srgbClr val="333333"/>
+                </a:solidFill>
                 <a:latin typeface="Calibri"/>
-              </a:defRPr>
-            </a:pPr>
-            <a:r>
+              </a:rPr>
               <a:t>500 iterations</a:t>
             </a:r>
-            <a:br/>
-            <a:r>
+          </a:p>
+          <a:p>
+            <a:pPr algn="ctr"/>
+            <a:r>
+              <a:rPr sz="1000" b="0">
+                <a:solidFill>
+                  <a:srgbClr val="333333"/>
+                </a:solidFill>
+                <a:latin typeface="Calibri"/>
+              </a:rPr>
               <a:t>3 strategies</a:t>
             </a:r>
-            <a:br/>
-            <a:r>
+          </a:p>
+          <a:p>
+            <a:pPr algn="ctr"/>
+            <a:r>
+              <a:rPr sz="1000" b="0">
+                <a:solidFill>
+                  <a:srgbClr val="333333"/>
+                </a:solidFill>
+                <a:latin typeface="Calibri"/>
+              </a:rPr>
               <a:t>ICR-guided selection</a:t>
             </a:r>
           </a:p>
@@ -12388,12 +12488,10 @@
           </a:bodyPr>
           <a:lstStyle/>
           <a:p>
-            <a:pPr>
-              <a:defRPr sz="1800" b="1">
+            <a:r>
+              <a:rPr sz="1800" b="1">
                 <a:latin typeface="Calibri"/>
-              </a:defRPr>
-            </a:pPr>
-            <a:r>
+              </a:rPr>
               <a:t>Key Findings</a:t>
             </a:r>
           </a:p>
@@ -12440,15 +12538,14 @@
           <a:bodyPr rtlCol="0" anchor="ctr" wrap="square"/>
           <a:lstStyle/>
           <a:p>
-            <a:pPr algn="ctr">
-              <a:defRPr sz="1100" b="1">
+            <a:pPr algn="ctr"/>
+            <a:r>
+              <a:rPr sz="1100" b="1">
                 <a:solidFill>
                   <a:srgbClr val="FFFFFF"/>
                 </a:solidFill>
                 <a:latin typeface="Calibri"/>
-              </a:defRPr>
-            </a:pPr>
-            <a:r>
+              </a:rPr>
               <a:t>Simulation</a:t>
             </a:r>
           </a:p>
@@ -12495,16 +12592,26 @@
           <a:bodyPr rtlCol="0" anchor="ctr" wrap="square"/>
           <a:lstStyle/>
           <a:p>
-            <a:pPr algn="ctr">
-              <a:defRPr sz="1000" b="0">
+            <a:pPr algn="ctr"/>
+            <a:r>
+              <a:rPr sz="1000" b="0">
+                <a:solidFill>
+                  <a:srgbClr val="333333"/>
+                </a:solidFill>
                 <a:latin typeface="Calibri"/>
-              </a:defRPr>
-            </a:pPr>
-            <a:r>
+              </a:rPr>
               <a:t>Heterogeneous ICR → Higher I²</a:t>
             </a:r>
-            <a:br/>
-            <a:r>
+          </a:p>
+          <a:p>
+            <a:pPr algn="ctr"/>
+            <a:r>
+              <a:rPr sz="1000" b="0">
+                <a:solidFill>
+                  <a:srgbClr val="333333"/>
+                </a:solidFill>
+                <a:latin typeface="Calibri"/>
+              </a:rPr>
               <a:t>(11.7% vs 11.0%)</a:t>
             </a:r>
           </a:p>
@@ -12551,15 +12658,14 @@
           <a:bodyPr rtlCol="0" anchor="ctr" wrap="square"/>
           <a:lstStyle/>
           <a:p>
-            <a:pPr algn="ctr">
-              <a:defRPr sz="1100" b="1">
+            <a:pPr algn="ctr"/>
+            <a:r>
+              <a:rPr sz="1100" b="1">
                 <a:solidFill>
                   <a:srgbClr val="FFFFFF"/>
                 </a:solidFill>
                 <a:latin typeface="Calibri"/>
-              </a:defRPr>
-            </a:pPr>
-            <a:r>
+              </a:rPr>
               <a:t>Real-World</a:t>
             </a:r>
           </a:p>
@@ -12606,16 +12712,26 @@
           <a:bodyPr rtlCol="0" anchor="ctr" wrap="square"/>
           <a:lstStyle/>
           <a:p>
-            <a:pPr algn="ctr">
-              <a:defRPr sz="1000" b="0">
+            <a:pPr algn="ctr"/>
+            <a:r>
+              <a:rPr sz="1000" b="0">
+                <a:solidFill>
+                  <a:srgbClr val="333333"/>
+                </a:solidFill>
                 <a:latin typeface="Calibri"/>
-              </a:defRPr>
-            </a:pPr>
-            <a:r>
+              </a:rPr>
               <a:t>Low ICRD = Stable MA</a:t>
             </a:r>
-            <a:br/>
-            <a:r>
+          </a:p>
+          <a:p>
+            <a:pPr algn="ctr"/>
+            <a:r>
+              <a:rPr sz="1000" b="0">
+                <a:solidFill>
+                  <a:srgbClr val="333333"/>
+                </a:solidFill>
+                <a:latin typeface="Calibri"/>
+              </a:rPr>
               <a:t>High ICRD = Heterogeneous MA</a:t>
             </a:r>
           </a:p>
@@ -12662,15 +12778,14 @@
           <a:bodyPr rtlCol="0" anchor="ctr" wrap="square"/>
           <a:lstStyle/>
           <a:p>
-            <a:pPr algn="ctr">
-              <a:defRPr sz="1100" b="1">
+            <a:pPr algn="ctr"/>
+            <a:r>
+              <a:rPr sz="1100" b="1">
                 <a:solidFill>
                   <a:srgbClr val="FFFFFF"/>
                 </a:solidFill>
                 <a:latin typeface="Calibri"/>
-              </a:defRPr>
-            </a:pPr>
-            <a:r>
+              </a:rPr>
               <a:t>PCA (IST)</a:t>
             </a:r>
           </a:p>
@@ -12717,16 +12832,26 @@
           <a:bodyPr rtlCol="0" anchor="ctr" wrap="square"/>
           <a:lstStyle/>
           <a:p>
-            <a:pPr algn="ctr">
-              <a:defRPr sz="1000" b="0">
+            <a:pPr algn="ctr"/>
+            <a:r>
+              <a:rPr sz="1000" b="0">
+                <a:solidFill>
+                  <a:srgbClr val="333333"/>
+                </a:solidFill>
                 <a:latin typeface="Calibri"/>
-              </a:defRPr>
-            </a:pPr>
-            <a:r>
+              </a:rPr>
               <a:t>ICR_pca × Mortality</a:t>
             </a:r>
-            <a:br/>
-            <a:r>
+          </a:p>
+          <a:p>
+            <a:pPr algn="ctr"/>
+            <a:r>
+              <a:rPr sz="1000" b="0">
+                <a:solidFill>
+                  <a:srgbClr val="333333"/>
+                </a:solidFill>
+                <a:latin typeface="Calibri"/>
+              </a:rPr>
               <a:t>r = 0.90 (p = 0.003)</a:t>
             </a:r>
           </a:p>
@@ -12773,15 +12898,14 @@
           <a:bodyPr rtlCol="0" anchor="ctr" wrap="square"/>
           <a:lstStyle/>
           <a:p>
-            <a:pPr algn="ctr">
-              <a:defRPr sz="1100" b="1">
+            <a:pPr algn="ctr"/>
+            <a:r>
+              <a:rPr sz="1100" b="1">
                 <a:solidFill>
                   <a:srgbClr val="FFFFFF"/>
                 </a:solidFill>
                 <a:latin typeface="Calibri"/>
-              </a:defRPr>
-            </a:pPr>
-            <a:r>
+              </a:rPr>
               <a:t>LOO Sensitivity</a:t>
             </a:r>
           </a:p>
@@ -12828,16 +12952,26 @@
           <a:bodyPr rtlCol="0" anchor="ctr" wrap="square"/>
           <a:lstStyle/>
           <a:p>
-            <a:pPr algn="ctr">
-              <a:defRPr sz="1000" b="0">
+            <a:pPr algn="ctr"/>
+            <a:r>
+              <a:rPr sz="1000" b="0">
+                <a:solidFill>
+                  <a:srgbClr val="333333"/>
+                </a:solidFill>
                 <a:latin typeface="Calibri"/>
-              </a:defRPr>
-            </a:pPr>
-            <a:r>
+              </a:rPr>
               <a:t>Robust: r = 0.84–0.95</a:t>
             </a:r>
-            <a:br/>
-            <a:r>
+          </a:p>
+          <a:p>
+            <a:pPr algn="ctr"/>
+            <a:r>
+              <a:rPr sz="1000" b="0">
+                <a:solidFill>
+                  <a:srgbClr val="333333"/>
+                </a:solidFill>
+                <a:latin typeface="Calibri"/>
+              </a:rPr>
               <a:t>All p &lt; 0.02</a:t>
             </a:r>
           </a:p>
@@ -12884,15 +13018,14 @@
           <a:bodyPr rtlCol="0" anchor="ctr" wrap="square"/>
           <a:lstStyle/>
           <a:p>
-            <a:pPr algn="ctr">
-              <a:defRPr sz="1100" b="1">
+            <a:pPr algn="ctr"/>
+            <a:r>
+              <a:rPr sz="1100" b="1">
                 <a:solidFill>
                   <a:srgbClr val="FFFFFF"/>
                 </a:solidFill>
                 <a:latin typeface="Calibri"/>
-              </a:defRPr>
-            </a:pPr>
-            <a:r>
+              </a:rPr>
               <a:t>Convergence</a:t>
             </a:r>
           </a:p>
@@ -12939,16 +13072,26 @@
           <a:bodyPr rtlCol="0" anchor="ctr" wrap="square"/>
           <a:lstStyle/>
           <a:p>
-            <a:pPr algn="ctr">
-              <a:defRPr sz="1000" b="0">
+            <a:pPr algn="ctr"/>
+            <a:r>
+              <a:rPr sz="1000" b="0">
+                <a:solidFill>
+                  <a:srgbClr val="333333"/>
+                </a:solidFill>
                 <a:latin typeface="Calibri"/>
-              </a:defRPr>
-            </a:pPr>
-            <a:r>
+              </a:rPr>
               <a:t>LINKO: lowest mean</a:t>
             </a:r>
-            <a:br/>
-            <a:r>
+          </a:p>
+          <a:p>
+            <a:pPr algn="ctr"/>
+            <a:r>
+              <a:rPr sz="1000" b="0">
+                <a:solidFill>
+                  <a:srgbClr val="333333"/>
+                </a:solidFill>
+                <a:latin typeface="Calibri"/>
+              </a:rPr>
               <a:t>studies to I²&lt;25%</a:t>
             </a:r>
           </a:p>
@@ -13046,15 +13189,14 @@
           <a:bodyPr rtlCol="0" anchor="ctr" wrap="square"/>
           <a:lstStyle/>
           <a:p>
-            <a:pPr algn="ctr">
-              <a:defRPr sz="1400" b="1">
+            <a:pPr algn="ctr"/>
+            <a:r>
+              <a:rPr sz="1400" b="1">
                 <a:solidFill>
                   <a:srgbClr val="FFFFFF"/>
                 </a:solidFill>
                 <a:latin typeface="Calibri"/>
-              </a:defRPr>
-            </a:pPr>
-            <a:r>
+              </a:rPr>
               <a:t>Standard Forest Plot</a:t>
             </a:r>
           </a:p>
@@ -13082,12 +13224,13 @@
           </a:bodyPr>
           <a:lstStyle/>
           <a:p>
-            <a:pPr>
-              <a:defRPr sz="1200">
+            <a:r>
+              <a:rPr sz="1200">
+                <a:solidFill>
+                  <a:srgbClr val="333333"/>
+                </a:solidFill>
                 <a:latin typeface="Calibri"/>
-              </a:defRPr>
-            </a:pPr>
-            <a:r>
+              </a:rPr>
               <a:t>• x-axis: Effect size</a:t>
             </a:r>
           </a:p>
@@ -13115,12 +13258,13 @@
           </a:bodyPr>
           <a:lstStyle/>
           <a:p>
-            <a:pPr>
-              <a:defRPr sz="1200">
+            <a:r>
+              <a:rPr sz="1200">
+                <a:solidFill>
+                  <a:srgbClr val="333333"/>
+                </a:solidFill>
                 <a:latin typeface="Calibri"/>
-              </a:defRPr>
-            </a:pPr>
-            <a:r>
+              </a:rPr>
               <a:t>• Study weight: Inverse variance</a:t>
             </a:r>
           </a:p>
@@ -13148,12 +13292,13 @@
           </a:bodyPr>
           <a:lstStyle/>
           <a:p>
-            <a:pPr>
-              <a:defRPr sz="1200">
+            <a:r>
+              <a:rPr sz="1200">
+                <a:solidFill>
+                  <a:srgbClr val="333333"/>
+                </a:solidFill>
                 <a:latin typeface="Calibri"/>
-              </a:defRPr>
-            </a:pPr>
-            <a:r>
+              </a:rPr>
               <a:t>• All bars same color</a:t>
             </a:r>
           </a:p>
@@ -13181,12 +13326,13 @@
           </a:bodyPr>
           <a:lstStyle/>
           <a:p>
-            <a:pPr>
-              <a:defRPr sz="1200">
+            <a:r>
+              <a:rPr sz="1200">
+                <a:solidFill>
+                  <a:srgbClr val="333333"/>
+                </a:solidFill>
                 <a:latin typeface="Calibri"/>
-              </a:defRPr>
-            </a:pPr>
-            <a:r>
+              </a:rPr>
               <a:t>✗ No ICR information visible</a:t>
             </a:r>
           </a:p>
@@ -13233,19 +13379,26 @@
           <a:bodyPr rtlCol="0" anchor="ctr" wrap="square"/>
           <a:lstStyle/>
           <a:p>
-            <a:pPr algn="ctr">
-              <a:defRPr sz="1600" b="1">
+            <a:pPr algn="ctr"/>
+            <a:r>
+              <a:rPr sz="1600" b="1">
                 <a:solidFill>
                   <a:srgbClr val="FFFFFF"/>
                 </a:solidFill>
                 <a:latin typeface="Calibri"/>
-              </a:defRPr>
-            </a:pPr>
-            <a:r>
+              </a:rPr>
               <a:t>Prism</a:t>
             </a:r>
-            <a:br/>
-            <a:r>
+          </a:p>
+          <a:p>
+            <a:pPr algn="ctr"/>
+            <a:r>
+              <a:rPr sz="1600" b="1">
+                <a:solidFill>
+                  <a:srgbClr val="FFFFFF"/>
+                </a:solidFill>
+                <a:latin typeface="Calibri"/>
+              </a:rPr>
               <a:t>→</a:t>
             </a:r>
           </a:p>
@@ -13292,15 +13445,14 @@
           <a:bodyPr rtlCol="0" anchor="ctr" wrap="square"/>
           <a:lstStyle/>
           <a:p>
-            <a:pPr algn="ctr">
-              <a:defRPr sz="1400" b="1">
+            <a:pPr algn="ctr"/>
+            <a:r>
+              <a:rPr sz="1400" b="1">
                 <a:solidFill>
                   <a:srgbClr val="FFFFFF"/>
                 </a:solidFill>
                 <a:latin typeface="Calibri"/>
-              </a:defRPr>
-            </a:pPr>
-            <a:r>
+              </a:rPr>
               <a:t>LINKO Prism Forest Plot</a:t>
             </a:r>
           </a:p>
@@ -13347,15 +13499,14 @@
           <a:bodyPr rtlCol="0" anchor="ctr" wrap="square"/>
           <a:lstStyle/>
           <a:p>
-            <a:pPr algn="l">
-              <a:defRPr sz="1100" b="0">
+            <a:pPr algn="l"/>
+            <a:r>
+              <a:rPr sz="1100" b="0">
                 <a:solidFill>
                   <a:srgbClr val="FFFFFF"/>
                 </a:solidFill>
                 <a:latin typeface="Calibri"/>
-              </a:defRPr>
-            </a:pPr>
-            <a:r>
+              </a:rPr>
               <a:t>x-axis: Effect size (unchanged)</a:t>
             </a:r>
           </a:p>
@@ -13402,19 +13553,26 @@
           <a:bodyPr rtlCol="0" anchor="ctr" wrap="square"/>
           <a:lstStyle/>
           <a:p>
-            <a:pPr algn="l">
-              <a:defRPr sz="1100" b="0">
+            <a:pPr algn="l"/>
+            <a:r>
+              <a:rPr sz="1100" b="0">
                 <a:solidFill>
                   <a:srgbClr val="FFFFFF"/>
                 </a:solidFill>
                 <a:latin typeface="Calibri"/>
-              </a:defRPr>
-            </a:pPr>
-            <a:r>
+              </a:rPr>
               <a:t>BAR COLOR = ICR value</a:t>
             </a:r>
-            <a:br/>
-            <a:r>
+          </a:p>
+          <a:p>
+            <a:pPr algn="l"/>
+            <a:r>
+              <a:rPr sz="1100" b="0">
+                <a:solidFill>
+                  <a:srgbClr val="FFFFFF"/>
+                </a:solidFill>
+                <a:latin typeface="Calibri"/>
+              </a:rPr>
               <a:t>  (warm red = high, cool blue = low)</a:t>
             </a:r>
           </a:p>
@@ -13461,19 +13619,26 @@
           <a:bodyPr rtlCol="0" anchor="ctr" wrap="square"/>
           <a:lstStyle/>
           <a:p>
-            <a:pPr algn="l">
-              <a:defRPr sz="1100" b="0">
+            <a:pPr algn="l"/>
+            <a:r>
+              <a:rPr sz="1100" b="0">
                 <a:solidFill>
                   <a:srgbClr val="FFFFFF"/>
                 </a:solidFill>
                 <a:latin typeface="Calibri"/>
-              </a:defRPr>
-            </a:pPr>
-            <a:r>
+              </a:rPr>
               <a:t>POINT SIZE = Secondary ICR</a:t>
             </a:r>
-            <a:br/>
-            <a:r>
+          </a:p>
+          <a:p>
+            <a:pPr algn="l"/>
+            <a:r>
+              <a:rPr sz="1100" b="0">
+                <a:solidFill>
+                  <a:srgbClr val="FFFFFF"/>
+                </a:solidFill>
+                <a:latin typeface="Calibri"/>
+              </a:rPr>
               <a:t>  (e.g., ICR_pca regression)</a:t>
             </a:r>
           </a:p>
@@ -13520,19 +13685,26 @@
           <a:bodyPr rtlCol="0" anchor="ctr" wrap="square"/>
           <a:lstStyle/>
           <a:p>
-            <a:pPr algn="l">
-              <a:defRPr sz="1100" b="0">
+            <a:pPr algn="l"/>
+            <a:r>
+              <a:rPr sz="1100" b="0">
                 <a:solidFill>
                   <a:srgbClr val="FFFFFF"/>
                 </a:solidFill>
                 <a:latin typeface="Calibri"/>
-              </a:defRPr>
-            </a:pPr>
-            <a:r>
+              </a:rPr>
               <a:t>SIDE PANEL = ICR bar chart</a:t>
             </a:r>
-            <a:br/>
-            <a:r>
+          </a:p>
+          <a:p>
+            <a:pPr algn="l"/>
+            <a:r>
+              <a:rPr sz="1100" b="0">
+                <a:solidFill>
+                  <a:srgbClr val="FFFFFF"/>
+                </a:solidFill>
+                <a:latin typeface="Calibri"/>
+              </a:rPr>
               <a:t>  aligned with each study</a:t>
             </a:r>
           </a:p>
@@ -13579,20 +13751,38 @@
           <a:bodyPr rtlCol="0" anchor="ctr" wrap="square"/>
           <a:lstStyle/>
           <a:p>
-            <a:pPr algn="ctr">
-              <a:defRPr sz="1300" b="0">
+            <a:pPr algn="ctr"/>
+            <a:r>
+              <a:rPr sz="1300" b="0">
+                <a:solidFill>
+                  <a:srgbClr val="555555"/>
+                </a:solidFill>
                 <a:latin typeface="Calibri"/>
-              </a:defRPr>
-            </a:pPr>
-            <a:r>
+              </a:rPr>
               <a:t>Like a prism decomposes white light into its spectrum,</a:t>
             </a:r>
-            <a:br/>
-            <a:r>
+          </a:p>
+          <a:p>
+            <a:pPr algn="ctr"/>
+            <a:r>
+              <a:rPr sz="1300" b="0">
+                <a:solidFill>
+                  <a:srgbClr val="555555"/>
+                </a:solidFill>
+                <a:latin typeface="Calibri"/>
+              </a:rPr>
               <a:t>the Prism Forest Plot decomposes the forest plot to reveal</a:t>
             </a:r>
-            <a:br/>
-            <a:r>
+          </a:p>
+          <a:p>
+            <a:pPr algn="ctr"/>
+            <a:r>
+              <a:rPr sz="1300" b="0">
+                <a:solidFill>
+                  <a:srgbClr val="555555"/>
+                </a:solidFill>
+                <a:latin typeface="Calibri"/>
+              </a:rPr>
               <a:t>hidden ICR dimensions of each study.</a:t>
             </a:r>
           </a:p>
@@ -13903,15 +14093,14 @@
                     <a:bodyPr/>
                     <a:lstStyle/>
                     <a:p>
-                      <a:pPr algn="ctr">
-                        <a:defRPr sz="1100" b="1">
+                      <a:pPr algn="ctr"/>
+                      <a:r>
+                        <a:rPr sz="1100" b="1">
                           <a:solidFill>
                             <a:srgbClr val="FFFFFF"/>
                           </a:solidFill>
                           <a:latin typeface="Calibri"/>
-                        </a:defRPr>
-                      </a:pPr>
-                      <a:r>
+                        </a:rPr>
                         <a:t>Metric</a:t>
                       </a:r>
                     </a:p>
@@ -13927,15 +14116,14 @@
                     <a:bodyPr/>
                     <a:lstStyle/>
                     <a:p>
-                      <a:pPr algn="ctr">
-                        <a:defRPr sz="1100" b="1">
+                      <a:pPr algn="ctr"/>
+                      <a:r>
+                        <a:rPr sz="1100" b="1">
                           <a:solidFill>
                             <a:srgbClr val="FFFFFF"/>
                           </a:solidFill>
                           <a:latin typeface="Calibri"/>
-                        </a:defRPr>
-                      </a:pPr>
-                      <a:r>
+                        </a:rPr>
                         <a:t>Scenario A (Uniform ICR)</a:t>
                       </a:r>
                     </a:p>
@@ -13951,15 +14139,14 @@
                     <a:bodyPr/>
                     <a:lstStyle/>
                     <a:p>
-                      <a:pPr algn="ctr">
-                        <a:defRPr sz="1100" b="1">
+                      <a:pPr algn="ctr"/>
+                      <a:r>
+                        <a:rPr sz="1100" b="1">
                           <a:solidFill>
                             <a:srgbClr val="FFFFFF"/>
                           </a:solidFill>
                           <a:latin typeface="Calibri"/>
-                        </a:defRPr>
-                      </a:pPr>
-                      <a:r>
+                        </a:rPr>
                         <a:t>Scenario B (Heterogeneous ICR)</a:t>
                       </a:r>
                     </a:p>
@@ -13977,12 +14164,11 @@
                     <a:bodyPr/>
                     <a:lstStyle/>
                     <a:p>
-                      <a:pPr algn="ctr">
-                        <a:defRPr sz="1000">
-                          <a:latin typeface="Calibri"/>
-                        </a:defRPr>
-                      </a:pPr>
-                      <a:r>
+                      <a:pPr algn="ctr"/>
+                      <a:r>
+                        <a:rPr sz="1000">
+                          <a:latin typeface="Calibri"/>
+                        </a:rPr>
                         <a:t>Mean I² (SD)</a:t>
                       </a:r>
                     </a:p>
@@ -13998,12 +14184,11 @@
                     <a:bodyPr/>
                     <a:lstStyle/>
                     <a:p>
-                      <a:pPr algn="ctr">
-                        <a:defRPr sz="1000">
-                          <a:latin typeface="Calibri"/>
-                        </a:defRPr>
-                      </a:pPr>
-                      <a:r>
+                      <a:pPr algn="ctr"/>
+                      <a:r>
+                        <a:rPr sz="1000">
+                          <a:latin typeface="Calibri"/>
+                        </a:rPr>
                         <a:t>11.0% (17.2)</a:t>
                       </a:r>
                     </a:p>
@@ -14019,12 +14204,11 @@
                     <a:bodyPr/>
                     <a:lstStyle/>
                     <a:p>
-                      <a:pPr algn="ctr">
-                        <a:defRPr sz="1000">
-                          <a:latin typeface="Calibri"/>
-                        </a:defRPr>
-                      </a:pPr>
-                      <a:r>
+                      <a:pPr algn="ctr"/>
+                      <a:r>
+                        <a:rPr sz="1000">
+                          <a:latin typeface="Calibri"/>
+                        </a:rPr>
                         <a:t>11.7% (16.0)</a:t>
                       </a:r>
                     </a:p>
@@ -14042,12 +14226,11 @@
                     <a:bodyPr/>
                     <a:lstStyle/>
                     <a:p>
-                      <a:pPr algn="ctr">
-                        <a:defRPr sz="1000">
-                          <a:latin typeface="Calibri"/>
-                        </a:defRPr>
-                      </a:pPr>
-                      <a:r>
+                      <a:pPr algn="ctr"/>
+                      <a:r>
+                        <a:rPr sz="1000">
+                          <a:latin typeface="Calibri"/>
+                        </a:rPr>
                         <a:t>Mean ICRD (SD)</a:t>
                       </a:r>
                     </a:p>
@@ -14059,12 +14242,11 @@
                     <a:bodyPr/>
                     <a:lstStyle/>
                     <a:p>
-                      <a:pPr algn="ctr">
-                        <a:defRPr sz="1000">
-                          <a:latin typeface="Calibri"/>
-                        </a:defRPr>
-                      </a:pPr>
-                      <a:r>
+                      <a:pPr algn="ctr"/>
+                      <a:r>
+                        <a:rPr sz="1000">
+                          <a:latin typeface="Calibri"/>
+                        </a:rPr>
                         <a:t>0.0000</a:t>
                       </a:r>
                     </a:p>
@@ -14076,12 +14258,11 @@
                     <a:bodyPr/>
                     <a:lstStyle/>
                     <a:p>
-                      <a:pPr algn="ctr">
-                        <a:defRPr sz="1000">
-                          <a:latin typeface="Calibri"/>
-                        </a:defRPr>
-                      </a:pPr>
-                      <a:r>
+                      <a:pPr algn="ctr"/>
+                      <a:r>
+                        <a:rPr sz="1000">
+                          <a:latin typeface="Calibri"/>
+                        </a:rPr>
                         <a:t>0.1753 (0.031)</a:t>
                       </a:r>
                     </a:p>
@@ -14095,12 +14276,11 @@
                     <a:bodyPr/>
                     <a:lstStyle/>
                     <a:p>
-                      <a:pPr algn="ctr">
-                        <a:defRPr sz="1000">
-                          <a:latin typeface="Calibri"/>
-                        </a:defRPr>
-                      </a:pPr>
-                      <a:r>
+                      <a:pPr algn="ctr"/>
+                      <a:r>
+                        <a:rPr sz="1000">
+                          <a:latin typeface="Calibri"/>
+                        </a:rPr>
                         <a:t>Mean Pooled Effect</a:t>
                       </a:r>
                     </a:p>
@@ -14116,12 +14296,11 @@
                     <a:bodyPr/>
                     <a:lstStyle/>
                     <a:p>
-                      <a:pPr algn="ctr">
-                        <a:defRPr sz="1000">
-                          <a:latin typeface="Calibri"/>
-                        </a:defRPr>
-                      </a:pPr>
-                      <a:r>
+                      <a:pPr algn="ctr"/>
+                      <a:r>
+                        <a:rPr sz="1000">
+                          <a:latin typeface="Calibri"/>
+                        </a:rPr>
                         <a:t>0.500</a:t>
                       </a:r>
                     </a:p>
@@ -14137,12 +14316,11 @@
                     <a:bodyPr/>
                     <a:lstStyle/>
                     <a:p>
-                      <a:pPr algn="ctr">
-                        <a:defRPr sz="1000">
-                          <a:latin typeface="Calibri"/>
-                        </a:defRPr>
-                      </a:pPr>
-                      <a:r>
+                      <a:pPr algn="ctr"/>
+                      <a:r>
+                        <a:rPr sz="1000">
+                          <a:latin typeface="Calibri"/>
+                        </a:rPr>
                         <a:t>0.496</a:t>
                       </a:r>
                     </a:p>
@@ -14160,12 +14338,11 @@
                     <a:bodyPr/>
                     <a:lstStyle/>
                     <a:p>
-                      <a:pPr algn="ctr">
-                        <a:defRPr sz="1000">
-                          <a:latin typeface="Calibri"/>
-                        </a:defRPr>
-                      </a:pPr>
-                      <a:r>
+                      <a:pPr algn="ctr"/>
+                      <a:r>
+                        <a:rPr sz="1000">
+                          <a:latin typeface="Calibri"/>
+                        </a:rPr>
                         <a:t>Effect Bias</a:t>
                       </a:r>
                     </a:p>
@@ -14177,12 +14354,11 @@
                     <a:bodyPr/>
                     <a:lstStyle/>
                     <a:p>
-                      <a:pPr algn="ctr">
-                        <a:defRPr sz="1000">
-                          <a:latin typeface="Calibri"/>
-                        </a:defRPr>
-                      </a:pPr>
-                      <a:r>
+                      <a:pPr algn="ctr"/>
+                      <a:r>
+                        <a:rPr sz="1000">
+                          <a:latin typeface="Calibri"/>
+                        </a:rPr>
                         <a:t>+0.0004</a:t>
                       </a:r>
                     </a:p>
@@ -14194,12 +14370,11 @@
                     <a:bodyPr/>
                     <a:lstStyle/>
                     <a:p>
-                      <a:pPr algn="ctr">
-                        <a:defRPr sz="1000">
-                          <a:latin typeface="Calibri"/>
-                        </a:defRPr>
-                      </a:pPr>
-                      <a:r>
+                      <a:pPr algn="ctr"/>
+                      <a:r>
+                        <a:rPr sz="1000">
+                          <a:latin typeface="Calibri"/>
+                        </a:rPr>
                         <a:t>-0.0042</a:t>
                       </a:r>
                     </a:p>
